--- a/Science_Teesside/Teaching_Packs/BUILD/lessons/W7B/BUILD_Science_Autumn1_W7B_Food_Chain_Investigation.pptx
+++ b/Science_Teesside/Teaching_Packs/BUILD/lessons/W7B/BUILD_Science_Autumn1_W7B_Food_Chain_Investigation.pptx
@@ -2,22 +2,22 @@
 <file path=ppt/presentation.xml><?xml version="1.0" encoding="utf-8"?>
 <p:presentation xmlns:p="http://schemas.openxmlformats.org/presentationml/2006/main">
   <p:sldMasterIdLst>
-    <p:sldMasterId xmlns:r="http://schemas.openxmlformats.org/officeDocument/2006/relationships" id="2147483648" r:id="Rc0cd3e39a19d4ce1"/>
+    <p:sldMasterId xmlns:r="http://schemas.openxmlformats.org/officeDocument/2006/relationships" id="2147483648" r:id="R44a4d2d6d4da436a"/>
   </p:sldMasterIdLst>
   <p:notesMasterIdLst>
-    <p:notesMasterId xmlns:r="http://schemas.openxmlformats.org/officeDocument/2006/relationships" r:id="R97ba5b371e4d48c5"/>
+    <p:notesMasterId xmlns:r="http://schemas.openxmlformats.org/officeDocument/2006/relationships" r:id="R512e1ea1041c415c"/>
   </p:notesMasterIdLst>
   <p:sldIdLst>
-    <p:sldId xmlns:r="http://schemas.openxmlformats.org/officeDocument/2006/relationships" id="256" r:id="R4dfb626ca6ca495d"/>
-    <p:sldId xmlns:r="http://schemas.openxmlformats.org/officeDocument/2006/relationships" id="257" r:id="Rcb759000f3574526"/>
-    <p:sldId xmlns:r="http://schemas.openxmlformats.org/officeDocument/2006/relationships" id="258" r:id="Re5ae735ccaf94c0e"/>
-    <p:sldId xmlns:r="http://schemas.openxmlformats.org/officeDocument/2006/relationships" id="259" r:id="R00ad4228ad4448ec"/>
-    <p:sldId xmlns:r="http://schemas.openxmlformats.org/officeDocument/2006/relationships" id="260" r:id="R3016c5e5b3b947d8"/>
-    <p:sldId xmlns:r="http://schemas.openxmlformats.org/officeDocument/2006/relationships" id="261" r:id="R8859dd2e264b44ec"/>
-    <p:sldId xmlns:r="http://schemas.openxmlformats.org/officeDocument/2006/relationships" id="262" r:id="R2e7af79a286a4b84"/>
-    <p:sldId xmlns:r="http://schemas.openxmlformats.org/officeDocument/2006/relationships" id="263" r:id="R4a0738529aa04de1"/>
-    <p:sldId xmlns:r="http://schemas.openxmlformats.org/officeDocument/2006/relationships" id="264" r:id="R6b5b28ab56304e96"/>
-    <p:sldId xmlns:r="http://schemas.openxmlformats.org/officeDocument/2006/relationships" id="265" r:id="R2745f39c4acd40bb"/>
+    <p:sldId xmlns:r="http://schemas.openxmlformats.org/officeDocument/2006/relationships" id="256" r:id="R6b6932b291c247f2"/>
+    <p:sldId xmlns:r="http://schemas.openxmlformats.org/officeDocument/2006/relationships" id="257" r:id="R113e77ca586e47fc"/>
+    <p:sldId xmlns:r="http://schemas.openxmlformats.org/officeDocument/2006/relationships" id="258" r:id="Rc74940c507ab44c9"/>
+    <p:sldId xmlns:r="http://schemas.openxmlformats.org/officeDocument/2006/relationships" id="259" r:id="R550120d9e21449b7"/>
+    <p:sldId xmlns:r="http://schemas.openxmlformats.org/officeDocument/2006/relationships" id="260" r:id="R9510410cd1474342"/>
+    <p:sldId xmlns:r="http://schemas.openxmlformats.org/officeDocument/2006/relationships" id="261" r:id="R304322957b2a405a"/>
+    <p:sldId xmlns:r="http://schemas.openxmlformats.org/officeDocument/2006/relationships" id="262" r:id="Rba64a49207424331"/>
+    <p:sldId xmlns:r="http://schemas.openxmlformats.org/officeDocument/2006/relationships" id="263" r:id="R535fb5f0a22c4c4e"/>
+    <p:sldId xmlns:r="http://schemas.openxmlformats.org/officeDocument/2006/relationships" id="264" r:id="Rf3a2faf607374f95"/>
+    <p:sldId xmlns:r="http://schemas.openxmlformats.org/officeDocument/2006/relationships" id="265" r:id="R7aa5eac6c10d40fc"/>
   </p:sldIdLst>
   <p:sldSz cx="12192000" cy="6858000"/>
   <p:notesSz cx="6858000" cy="9144000"/>
@@ -499,6 +499,15 @@
               <a:t>[/Sources]</a:t>
             </a:r>
           </a:p>
+          <a:p xmlns:a="http://schemas.openxmlformats.org/drawingml/2006/main">
+            <a:r>
+              <a:t>
+[Sources]
+https://madebymatt.uk/Lessons/Science_Teesside/Teaching_Packs/BUILD/ — original lesson text, timings and teacher notes retained.
+https://madebymatt.uk/Lessons/Science_Teesside/Build/ — existing Made by Matt scientific artwork, where shown.
+[/Sources]</a:t>
+            </a:r>
+          </a:p>
         </p:txBody>
       </p:sp>
       <p:sp>
@@ -614,6 +623,15 @@
               <a:t>[/Sources]</a:t>
             </a:r>
           </a:p>
+          <a:p xmlns:a="http://schemas.openxmlformats.org/drawingml/2006/main">
+            <a:r>
+              <a:t>
+[Sources]
+https://madebymatt.uk/Lessons/Science_Teesside/Teaching_Packs/BUILD/ — original lesson text, timings and teacher notes retained.
+https://madebymatt.uk/Lessons/Science_Teesside/Build/ — existing Made by Matt scientific artwork, where shown.
+[/Sources]</a:t>
+            </a:r>
+          </a:p>
         </p:txBody>
       </p:sp>
       <p:sp>
@@ -729,6 +747,15 @@
               <a:t>[/Sources]</a:t>
             </a:r>
           </a:p>
+          <a:p xmlns:a="http://schemas.openxmlformats.org/drawingml/2006/main">
+            <a:r>
+              <a:t>
+[Sources]
+https://madebymatt.uk/Lessons/Science_Teesside/Teaching_Packs/BUILD/ — original lesson text, timings and teacher notes retained.
+https://madebymatt.uk/Lessons/Science_Teesside/Build/ — existing Made by Matt scientific artwork, where shown.
+[/Sources]</a:t>
+            </a:r>
+          </a:p>
         </p:txBody>
       </p:sp>
       <p:sp>
@@ -844,6 +871,15 @@
               <a:t>[/Sources]</a:t>
             </a:r>
           </a:p>
+          <a:p xmlns:a="http://schemas.openxmlformats.org/drawingml/2006/main">
+            <a:r>
+              <a:t>
+[Sources]
+https://madebymatt.uk/Lessons/Science_Teesside/Teaching_Packs/BUILD/ — original lesson text, timings and teacher notes retained.
+https://madebymatt.uk/Lessons/Science_Teesside/Build/ — existing Made by Matt scientific artwork, where shown.
+[/Sources]</a:t>
+            </a:r>
+          </a:p>
         </p:txBody>
       </p:sp>
       <p:sp>
@@ -959,6 +995,15 @@
               <a:t>[/Sources]</a:t>
             </a:r>
           </a:p>
+          <a:p xmlns:a="http://schemas.openxmlformats.org/drawingml/2006/main">
+            <a:r>
+              <a:t>
+[Sources]
+https://madebymatt.uk/Lessons/Science_Teesside/Teaching_Packs/BUILD/ — original lesson text, timings and teacher notes retained.
+https://madebymatt.uk/Lessons/Science_Teesside/Build/ — existing Made by Matt scientific artwork, where shown.
+[/Sources]</a:t>
+            </a:r>
+          </a:p>
         </p:txBody>
       </p:sp>
       <p:sp>
@@ -1074,6 +1119,15 @@
               <a:t>[/Sources]</a:t>
             </a:r>
           </a:p>
+          <a:p xmlns:a="http://schemas.openxmlformats.org/drawingml/2006/main">
+            <a:r>
+              <a:t>
+[Sources]
+https://madebymatt.uk/Lessons/Science_Teesside/Teaching_Packs/BUILD/ — original lesson text, timings and teacher notes retained.
+https://madebymatt.uk/Lessons/Science_Teesside/Build/ — existing Made by Matt scientific artwork, where shown.
+[/Sources]</a:t>
+            </a:r>
+          </a:p>
         </p:txBody>
       </p:sp>
       <p:sp>
@@ -1189,6 +1243,15 @@
               <a:t>[/Sources]</a:t>
             </a:r>
           </a:p>
+          <a:p xmlns:a="http://schemas.openxmlformats.org/drawingml/2006/main">
+            <a:r>
+              <a:t>
+[Sources]
+https://madebymatt.uk/Lessons/Science_Teesside/Teaching_Packs/BUILD/ — original lesson text, timings and teacher notes retained.
+https://madebymatt.uk/Lessons/Science_Teesside/Build/ — existing Made by Matt scientific artwork, where shown.
+[/Sources]</a:t>
+            </a:r>
+          </a:p>
         </p:txBody>
       </p:sp>
       <p:sp>
@@ -1304,6 +1367,15 @@
               <a:t>[/Sources]</a:t>
             </a:r>
           </a:p>
+          <a:p xmlns:a="http://schemas.openxmlformats.org/drawingml/2006/main">
+            <a:r>
+              <a:t>
+[Sources]
+https://madebymatt.uk/Lessons/Science_Teesside/Teaching_Packs/BUILD/ — original lesson text, timings and teacher notes retained.
+https://madebymatt.uk/Lessons/Science_Teesside/Build/ — existing Made by Matt scientific artwork, where shown.
+[/Sources]</a:t>
+            </a:r>
+          </a:p>
         </p:txBody>
       </p:sp>
       <p:sp>
@@ -1419,6 +1491,15 @@
               <a:t>[/Sources]</a:t>
             </a:r>
           </a:p>
+          <a:p xmlns:a="http://schemas.openxmlformats.org/drawingml/2006/main">
+            <a:r>
+              <a:t>
+[Sources]
+https://madebymatt.uk/Lessons/Science_Teesside/Teaching_Packs/BUILD/ — original lesson text, timings and teacher notes retained.
+https://madebymatt.uk/Lessons/Science_Teesside/Build/ — existing Made by Matt scientific artwork, where shown.
+[/Sources]</a:t>
+            </a:r>
+          </a:p>
         </p:txBody>
       </p:sp>
       <p:sp>
@@ -1532,6 +1613,15 @@
           <a:p xmlns:a="http://schemas.openxmlformats.org/drawingml/2006/main">
             <a:r>
               <a:t>[/Sources]</a:t>
+            </a:r>
+          </a:p>
+          <a:p xmlns:a="http://schemas.openxmlformats.org/drawingml/2006/main">
+            <a:r>
+              <a:t>
+[Sources]
+https://madebymatt.uk/Lessons/Science_Teesside/Teaching_Packs/BUILD/ — original lesson text, timings and teacher notes retained.
+https://madebymatt.uk/Lessons/Science_Teesside/Build/ — existing Made by Matt scientific artwork, where shown.
+[/Sources]</a:t>
             </a:r>
           </a:p>
         </p:txBody>
@@ -1599,7 +1689,7 @@
   </p:cSld>
   <p:clrMap bg1="lt1" tx1="dk1" bg2="lt2" tx2="dk2" accent1="accent1" accent2="accent2" accent3="accent3" accent4="accent4" accent5="accent5" accent6="accent6" hlink="hlink" folHlink="folHlink"/>
   <p:sldLayoutIdLst>
-    <p:sldLayoutId xmlns:r="http://schemas.openxmlformats.org/officeDocument/2006/relationships" id="2147483649" r:id="R92af4db02dc048cf"/>
+    <p:sldLayoutId xmlns:r="http://schemas.openxmlformats.org/officeDocument/2006/relationships" id="2147483649" r:id="R8b3404729f4e4205"/>
   </p:sldLayoutIdLst>
   <p:txStyles>
     <p:titleStyle>
@@ -2132,7 +2222,7 @@
     <p:bg>
       <p:bgPr>
         <a:solidFill xmlns:a="http://schemas.openxmlformats.org/drawingml/2006/main">
-          <a:srgbClr val="F5F1E8"/>
+          <a:srgbClr val="FBF9F3"/>
         </a:solidFill>
       </p:bgPr>
     </p:bg>
@@ -2161,8 +2251,8 @@
         </p:nvSpPr>
         <p:spPr>
           <a:xfrm xmlns:a="http://schemas.openxmlformats.org/drawingml/2006/main">
-            <a:off x="609600" y="552450"/>
-            <a:ext cx="781050" cy="57150"/>
+            <a:off x="609600" y="742950"/>
+            <a:ext cx="9906000" cy="38100"/>
           </a:xfrm>
           <a:prstGeom xmlns:a="http://schemas.openxmlformats.org/drawingml/2006/main" prst="rect">
             <a:avLst/>
@@ -2192,8 +2282,8 @@
         </p:nvSpPr>
         <p:spPr>
           <a:xfrm xmlns:a="http://schemas.openxmlformats.org/drawingml/2006/main">
-            <a:off x="609600" y="762000"/>
-            <a:ext cx="9334500" cy="285750"/>
+            <a:off x="609600" y="342900"/>
+            <a:ext cx="9334500" cy="266700"/>
           </a:xfrm>
           <a:prstGeom xmlns:a="http://schemas.openxmlformats.org/drawingml/2006/main" prst="rect">
             <a:avLst/>
@@ -2205,21 +2295,30 @@
           </a:ln>
         </p:spPr>
         <p:txBody>
-          <a:bodyPr xmlns:a="http://schemas.openxmlformats.org/drawingml/2006/main" lIns="0" tIns="0" rIns="0" bIns="0" anchor="ctr"/>
+          <a:bodyPr xmlns:a="http://schemas.openxmlformats.org/drawingml/2006/main" wrap="square" lIns="0" tIns="0" rIns="0" bIns="0" anchor="ctr">
+            <a:noAutofit/>
+          </a:bodyPr>
           <a:lstStyle xmlns:a="http://schemas.openxmlformats.org/drawingml/2006/main"/>
           <a:p xmlns:a="http://schemas.openxmlformats.org/drawingml/2006/main">
             <a:pPr>
-              <a:defRPr sz="1500" b="1">
+              <a:buNone/>
+              <a:defRPr sz="1425" b="1">
                 <a:solidFill>
                   <a:srgbClr val="28685E"/>
                 </a:solidFill>
+                <a:latin typeface="Arial"/>
+                <a:ea typeface="Arial"/>
+                <a:cs typeface="Arial"/>
               </a:defRPr>
             </a:pPr>
             <a:r>
-              <a:rPr sz="1500" b="1">
+              <a:rPr sz="1425" b="1">
                 <a:solidFill>
                   <a:srgbClr val="28685E"/>
                 </a:solidFill>
+                <a:latin typeface="Arial"/>
+                <a:ea typeface="Arial"/>
+                <a:cs typeface="Arial"/>
               </a:rPr>
               <a:t>MADE BY MATT  /  BUILD SCIENCE</a:t>
             </a:r>
@@ -2228,14 +2327,14 @@
       </p:sp>
       <p:pic>
         <p:nvPicPr>
-          <p:cNvPr id="12" name=""/>
+          <p:cNvPr id="15" name=""/>
           <p:cNvPicPr>
             <a:picLocks xmlns:a="http://schemas.openxmlformats.org/drawingml/2006/main" noChangeAspect="1"/>
           </p:cNvPicPr>
           <p:nvPr/>
         </p:nvPicPr>
         <p:blipFill>
-          <a:blip xmlns:r="http://schemas.openxmlformats.org/officeDocument/2006/relationships" xmlns:a="http://schemas.openxmlformats.org/drawingml/2006/main" r:embed="R01a9aae4e1584dfc"/>
+          <a:blip xmlns:r="http://schemas.openxmlformats.org/officeDocument/2006/relationships" xmlns:a="http://schemas.openxmlformats.org/drawingml/2006/main" r:embed="Rcf38a1b966924c16"/>
           <a:stretch xmlns:a="http://schemas.openxmlformats.org/drawingml/2006/main"/>
         </p:blipFill>
         <p:spPr>
@@ -2264,8 +2363,8 @@
         </p:nvSpPr>
         <p:spPr>
           <a:xfrm xmlns:a="http://schemas.openxmlformats.org/drawingml/2006/main">
-            <a:off x="609600" y="1352550"/>
-            <a:ext cx="10972800" cy="952500"/>
+            <a:off x="609600" y="1047750"/>
+            <a:ext cx="10972800" cy="895350"/>
           </a:xfrm>
           <a:prstGeom xmlns:a="http://schemas.openxmlformats.org/drawingml/2006/main" prst="rect">
             <a:avLst/>
@@ -2277,21 +2376,30 @@
           </a:ln>
         </p:spPr>
         <p:txBody>
-          <a:bodyPr xmlns:a="http://schemas.openxmlformats.org/drawingml/2006/main" lIns="0" tIns="0" rIns="0" bIns="0" anchor="ctr"/>
+          <a:bodyPr xmlns:a="http://schemas.openxmlformats.org/drawingml/2006/main" wrap="square" lIns="0" tIns="0" rIns="0" bIns="0" anchor="ctr">
+            <a:noAutofit/>
+          </a:bodyPr>
           <a:lstStyle xmlns:a="http://schemas.openxmlformats.org/drawingml/2006/main"/>
           <a:p xmlns:a="http://schemas.openxmlformats.org/drawingml/2006/main">
             <a:pPr>
-              <a:defRPr sz="3750" b="1">
+              <a:buNone/>
+              <a:defRPr sz="3600" b="1">
                 <a:solidFill>
                   <a:srgbClr val="152B3A"/>
                 </a:solidFill>
+                <a:latin typeface="Arial"/>
+                <a:ea typeface="Arial"/>
+                <a:cs typeface="Arial"/>
               </a:defRPr>
             </a:pPr>
             <a:r>
-              <a:rPr sz="3750" b="1">
+              <a:rPr sz="3600" b="1">
                 <a:solidFill>
                   <a:srgbClr val="152B3A"/>
                 </a:solidFill>
+                <a:latin typeface="Arial"/>
+                <a:ea typeface="Arial"/>
+                <a:cs typeface="Arial"/>
               </a:rPr>
               <a:t>Food-chain change investigation</a:t>
             </a:r>
@@ -2358,21 +2466,30 @@
           </a:ln>
         </p:spPr>
         <p:txBody>
-          <a:bodyPr xmlns:a="http://schemas.openxmlformats.org/drawingml/2006/main" lIns="0" tIns="0" rIns="0" bIns="0" anchor="ctr"/>
+          <a:bodyPr xmlns:a="http://schemas.openxmlformats.org/drawingml/2006/main" wrap="square" lIns="0" tIns="0" rIns="0" bIns="0" anchor="ctr">
+            <a:noAutofit/>
+          </a:bodyPr>
           <a:lstStyle xmlns:a="http://schemas.openxmlformats.org/drawingml/2006/main"/>
           <a:p xmlns:a="http://schemas.openxmlformats.org/drawingml/2006/main">
             <a:pPr>
-              <a:defRPr sz="1275" b="0">
+              <a:buNone/>
+              <a:defRPr sz="1200" b="0">
                 <a:solidFill>
                   <a:srgbClr val="50616B"/>
                 </a:solidFill>
+                <a:latin typeface="Arial"/>
+                <a:ea typeface="Arial"/>
+                <a:cs typeface="Arial"/>
               </a:defRPr>
             </a:pPr>
             <a:r>
-              <a:rPr sz="1275" b="0">
+              <a:rPr sz="1200" b="0">
                 <a:solidFill>
                   <a:srgbClr val="50616B"/>
                 </a:solidFill>
+                <a:latin typeface="Arial"/>
+                <a:ea typeface="Arial"/>
+                <a:cs typeface="Arial"/>
               </a:rPr>
               <a:t>AUTUMN 1  ·  WEEK 7  ·  LESSON B</a:t>
             </a:r>
@@ -2408,14 +2525,20 @@
           </a:ln>
         </p:spPr>
         <p:txBody>
-          <a:bodyPr xmlns:a="http://schemas.openxmlformats.org/drawingml/2006/main" lIns="0" tIns="0" rIns="0" bIns="0" anchor="ctr"/>
+          <a:bodyPr xmlns:a="http://schemas.openxmlformats.org/drawingml/2006/main" wrap="square" lIns="0" tIns="0" rIns="0" bIns="0" anchor="ctr">
+            <a:noAutofit/>
+          </a:bodyPr>
           <a:lstStyle xmlns:a="http://schemas.openxmlformats.org/drawingml/2006/main"/>
           <a:p xmlns:a="http://schemas.openxmlformats.org/drawingml/2006/main">
             <a:pPr>
+              <a:buNone/>
               <a:defRPr sz="1350" b="1">
                 <a:solidFill>
                   <a:srgbClr val="28685E"/>
                 </a:solidFill>
+                <a:latin typeface="Arial"/>
+                <a:ea typeface="Arial"/>
+                <a:cs typeface="Arial"/>
               </a:defRPr>
             </a:pPr>
             <a:r>
@@ -2423,6 +2546,9 @@
                 <a:solidFill>
                   <a:srgbClr val="28685E"/>
                 </a:solidFill>
+                <a:latin typeface="Arial"/>
+                <a:ea typeface="Arial"/>
+                <a:cs typeface="Arial"/>
               </a:rPr>
               <a:t>01</a:t>
             </a:r>
@@ -2445,8 +2571,8 @@
         </p:nvSpPr>
         <p:spPr>
           <a:xfrm xmlns:a="http://schemas.openxmlformats.org/drawingml/2006/main">
-            <a:off x="609600" y="2809875"/>
-            <a:ext cx="10668000" cy="1000125"/>
+            <a:off x="609600" y="2400300"/>
+            <a:ext cx="6191250" cy="1409700"/>
           </a:xfrm>
           <a:prstGeom xmlns:a="http://schemas.openxmlformats.org/drawingml/2006/main" prst="rect">
             <a:avLst/>
@@ -2458,21 +2584,30 @@
           </a:ln>
         </p:spPr>
         <p:txBody>
-          <a:bodyPr xmlns:a="http://schemas.openxmlformats.org/drawingml/2006/main" lIns="0" tIns="0" rIns="0" bIns="0" anchor="ctr"/>
+          <a:bodyPr xmlns:a="http://schemas.openxmlformats.org/drawingml/2006/main" wrap="square" lIns="0" tIns="0" rIns="0" bIns="0" anchor="ctr">
+            <a:noAutofit/>
+          </a:bodyPr>
           <a:lstStyle xmlns:a="http://schemas.openxmlformats.org/drawingml/2006/main"/>
           <a:p xmlns:a="http://schemas.openxmlformats.org/drawingml/2006/main">
             <a:pPr>
-              <a:defRPr sz="3900" b="1">
+              <a:buNone/>
+              <a:defRPr sz="3450" b="1">
                 <a:solidFill>
                   <a:srgbClr val="28685E"/>
                 </a:solidFill>
+                <a:latin typeface="Arial"/>
+                <a:ea typeface="Arial"/>
+                <a:cs typeface="Arial"/>
               </a:defRPr>
             </a:pPr>
             <a:r>
-              <a:rPr sz="3900" b="1">
+              <a:rPr sz="3450" b="1">
                 <a:solidFill>
                   <a:srgbClr val="28685E"/>
                 </a:solidFill>
+                <a:latin typeface="Arial"/>
+                <a:ea typeface="Arial"/>
+                <a:cs typeface="Arial"/>
               </a:rPr>
               <a:t>Build it. Test the arrows. Explain a change.</a:t>
             </a:r>
@@ -2495,8 +2630,8 @@
         </p:nvSpPr>
         <p:spPr>
           <a:xfrm xmlns:a="http://schemas.openxmlformats.org/drawingml/2006/main">
-            <a:off x="609600" y="4143375"/>
-            <a:ext cx="10668000" cy="1143000"/>
+            <a:off x="609600" y="4286250"/>
+            <a:ext cx="6667500" cy="1314450"/>
           </a:xfrm>
           <a:prstGeom xmlns:a="http://schemas.openxmlformats.org/drawingml/2006/main" prst="rect">
             <a:avLst/>
@@ -2508,27 +2643,58 @@
           </a:ln>
         </p:spPr>
         <p:txBody>
-          <a:bodyPr xmlns:a="http://schemas.openxmlformats.org/drawingml/2006/main" lIns="0" tIns="0" rIns="0" bIns="0" anchor="ctr"/>
+          <a:bodyPr xmlns:a="http://schemas.openxmlformats.org/drawingml/2006/main" wrap="square" lIns="0" tIns="0" rIns="0" bIns="0" anchor="ctr">
+            <a:noAutofit/>
+          </a:bodyPr>
           <a:lstStyle xmlns:a="http://schemas.openxmlformats.org/drawingml/2006/main"/>
           <a:p xmlns:a="http://schemas.openxmlformats.org/drawingml/2006/main">
             <a:pPr>
-              <a:defRPr sz="2550" b="0">
+              <a:buNone/>
+              <a:defRPr sz="2400" b="0">
                 <a:solidFill>
                   <a:srgbClr val="152B3A"/>
                 </a:solidFill>
+                <a:latin typeface="Arial"/>
+                <a:ea typeface="Arial"/>
+                <a:cs typeface="Arial"/>
               </a:defRPr>
             </a:pPr>
             <a:r>
-              <a:rPr sz="2550" b="0">
+              <a:rPr sz="2400" b="0">
                 <a:solidFill>
                   <a:srgbClr val="152B3A"/>
                 </a:solidFill>
+                <a:latin typeface="Arial"/>
+                <a:ea typeface="Arial"/>
+                <a:cs typeface="Arial"/>
               </a:rPr>
               <a:t>I can use feeding clues to make and improve a prediction.</a:t>
             </a:r>
           </a:p>
         </p:txBody>
       </p:sp>
+      <p:pic>
+        <p:nvPicPr>
+          <p:cNvPr id="22" name=""/>
+          <p:cNvPicPr>
+            <a:picLocks xmlns:a="http://schemas.openxmlformats.org/drawingml/2006/main" noChangeAspect="1"/>
+          </p:cNvPicPr>
+          <p:nvPr/>
+        </p:nvPicPr>
+        <p:blipFill>
+          <a:blip xmlns:r="http://schemas.openxmlformats.org/officeDocument/2006/relationships" xmlns:a="http://schemas.openxmlformats.org/drawingml/2006/main" r:embed="R96fb3e168560492c"/>
+          <a:stretch xmlns:a="http://schemas.openxmlformats.org/drawingml/2006/main"/>
+        </p:blipFill>
+        <p:spPr>
+          <a:xfrm xmlns:a="http://schemas.openxmlformats.org/drawingml/2006/main">
+            <a:off x="7620000" y="2466856"/>
+            <a:ext cx="3714750" cy="2591038"/>
+          </a:xfrm>
+          <a:prstGeom xmlns:a="http://schemas.openxmlformats.org/drawingml/2006/main" prst="rect">
+            <a:avLst/>
+          </a:prstGeom>
+        </p:spPr>
+      </p:pic>
     </p:spTree>
     <p:extLst>
       <p:ext uri="{BB962C8B-B14F-4D97-AF65-F5344CB8AC3E}">
@@ -2545,7 +2711,7 @@
     <p:bg>
       <p:bgPr>
         <a:solidFill xmlns:a="http://schemas.openxmlformats.org/drawingml/2006/main">
-          <a:srgbClr val="F5F1E8"/>
+          <a:srgbClr val="FBF9F3"/>
         </a:solidFill>
       </p:bgPr>
     </p:bg>
@@ -2574,8 +2740,8 @@
         </p:nvSpPr>
         <p:spPr>
           <a:xfrm xmlns:a="http://schemas.openxmlformats.org/drawingml/2006/main">
-            <a:off x="609600" y="552450"/>
-            <a:ext cx="781050" cy="57150"/>
+            <a:off x="609600" y="742950"/>
+            <a:ext cx="9906000" cy="38100"/>
           </a:xfrm>
           <a:prstGeom xmlns:a="http://schemas.openxmlformats.org/drawingml/2006/main" prst="rect">
             <a:avLst/>
@@ -2605,8 +2771,8 @@
         </p:nvSpPr>
         <p:spPr>
           <a:xfrm xmlns:a="http://schemas.openxmlformats.org/drawingml/2006/main">
-            <a:off x="609600" y="762000"/>
-            <a:ext cx="9334500" cy="285750"/>
+            <a:off x="609600" y="342900"/>
+            <a:ext cx="9334500" cy="266700"/>
           </a:xfrm>
           <a:prstGeom xmlns:a="http://schemas.openxmlformats.org/drawingml/2006/main" prst="rect">
             <a:avLst/>
@@ -2618,21 +2784,30 @@
           </a:ln>
         </p:spPr>
         <p:txBody>
-          <a:bodyPr xmlns:a="http://schemas.openxmlformats.org/drawingml/2006/main" lIns="0" tIns="0" rIns="0" bIns="0" anchor="ctr"/>
+          <a:bodyPr xmlns:a="http://schemas.openxmlformats.org/drawingml/2006/main" wrap="square" lIns="0" tIns="0" rIns="0" bIns="0" anchor="ctr">
+            <a:noAutofit/>
+          </a:bodyPr>
           <a:lstStyle xmlns:a="http://schemas.openxmlformats.org/drawingml/2006/main"/>
           <a:p xmlns:a="http://schemas.openxmlformats.org/drawingml/2006/main">
             <a:pPr>
-              <a:defRPr sz="1500" b="1">
+              <a:buNone/>
+              <a:defRPr sz="1425" b="1">
                 <a:solidFill>
                   <a:srgbClr val="28685E"/>
                 </a:solidFill>
+                <a:latin typeface="Arial"/>
+                <a:ea typeface="Arial"/>
+                <a:cs typeface="Arial"/>
               </a:defRPr>
             </a:pPr>
             <a:r>
-              <a:rPr sz="1500" b="1">
+              <a:rPr sz="1425" b="1">
                 <a:solidFill>
                   <a:srgbClr val="28685E"/>
                 </a:solidFill>
+                <a:latin typeface="Arial"/>
+                <a:ea typeface="Arial"/>
+                <a:cs typeface="Arial"/>
               </a:rPr>
               <a:t>MADE BY MATT  /  BUILD SCIENCE</a:t>
             </a:r>
@@ -2641,14 +2816,14 @@
       </p:sp>
       <p:pic>
         <p:nvPicPr>
-          <p:cNvPr id="13" name=""/>
+          <p:cNvPr id="15" name=""/>
           <p:cNvPicPr>
             <a:picLocks xmlns:a="http://schemas.openxmlformats.org/drawingml/2006/main" noChangeAspect="1"/>
           </p:cNvPicPr>
           <p:nvPr/>
         </p:nvPicPr>
         <p:blipFill>
-          <a:blip xmlns:r="http://schemas.openxmlformats.org/officeDocument/2006/relationships" xmlns:a="http://schemas.openxmlformats.org/drawingml/2006/main" r:embed="R913446add8d44418"/>
+          <a:blip xmlns:r="http://schemas.openxmlformats.org/officeDocument/2006/relationships" xmlns:a="http://schemas.openxmlformats.org/drawingml/2006/main" r:embed="R8e278238448e4dd4"/>
           <a:stretch xmlns:a="http://schemas.openxmlformats.org/drawingml/2006/main"/>
         </p:blipFill>
         <p:spPr>
@@ -2677,8 +2852,8 @@
         </p:nvSpPr>
         <p:spPr>
           <a:xfrm xmlns:a="http://schemas.openxmlformats.org/drawingml/2006/main">
-            <a:off x="609600" y="1352550"/>
-            <a:ext cx="10972800" cy="952500"/>
+            <a:off x="609600" y="1047750"/>
+            <a:ext cx="10972800" cy="895350"/>
           </a:xfrm>
           <a:prstGeom xmlns:a="http://schemas.openxmlformats.org/drawingml/2006/main" prst="rect">
             <a:avLst/>
@@ -2690,21 +2865,30 @@
           </a:ln>
         </p:spPr>
         <p:txBody>
-          <a:bodyPr xmlns:a="http://schemas.openxmlformats.org/drawingml/2006/main" lIns="0" tIns="0" rIns="0" bIns="0" anchor="ctr"/>
+          <a:bodyPr xmlns:a="http://schemas.openxmlformats.org/drawingml/2006/main" wrap="square" lIns="0" tIns="0" rIns="0" bIns="0" anchor="ctr">
+            <a:noAutofit/>
+          </a:bodyPr>
           <a:lstStyle xmlns:a="http://schemas.openxmlformats.org/drawingml/2006/main"/>
           <a:p xmlns:a="http://schemas.openxmlformats.org/drawingml/2006/main">
             <a:pPr>
-              <a:defRPr sz="3750" b="1">
+              <a:buNone/>
+              <a:defRPr sz="3600" b="1">
                 <a:solidFill>
                   <a:srgbClr val="152B3A"/>
                 </a:solidFill>
+                <a:latin typeface="Arial"/>
+                <a:ea typeface="Arial"/>
+                <a:cs typeface="Arial"/>
               </a:defRPr>
             </a:pPr>
             <a:r>
-              <a:rPr sz="3750" b="1">
+              <a:rPr sz="3600" b="1">
                 <a:solidFill>
                   <a:srgbClr val="152B3A"/>
                 </a:solidFill>
+                <a:latin typeface="Arial"/>
+                <a:ea typeface="Arial"/>
+                <a:cs typeface="Arial"/>
               </a:rPr>
               <a:t>Read the evidence behind the chain</a:t>
             </a:r>
@@ -2771,21 +2955,30 @@
           </a:ln>
         </p:spPr>
         <p:txBody>
-          <a:bodyPr xmlns:a="http://schemas.openxmlformats.org/drawingml/2006/main" lIns="0" tIns="0" rIns="0" bIns="0" anchor="ctr"/>
+          <a:bodyPr xmlns:a="http://schemas.openxmlformats.org/drawingml/2006/main" wrap="square" lIns="0" tIns="0" rIns="0" bIns="0" anchor="ctr">
+            <a:noAutofit/>
+          </a:bodyPr>
           <a:lstStyle xmlns:a="http://schemas.openxmlformats.org/drawingml/2006/main"/>
           <a:p xmlns:a="http://schemas.openxmlformats.org/drawingml/2006/main">
             <a:pPr>
-              <a:defRPr sz="1275" b="0">
+              <a:buNone/>
+              <a:defRPr sz="1200" b="0">
                 <a:solidFill>
                   <a:srgbClr val="50616B"/>
                 </a:solidFill>
+                <a:latin typeface="Arial"/>
+                <a:ea typeface="Arial"/>
+                <a:cs typeface="Arial"/>
               </a:defRPr>
             </a:pPr>
             <a:r>
-              <a:rPr sz="1275" b="0">
+              <a:rPr sz="1200" b="0">
                 <a:solidFill>
                   <a:srgbClr val="50616B"/>
                 </a:solidFill>
+                <a:latin typeface="Arial"/>
+                <a:ea typeface="Arial"/>
+                <a:cs typeface="Arial"/>
               </a:rPr>
               <a:t>AUTUMN 1  ·  WEEK 7  ·  LESSON B</a:t>
             </a:r>
@@ -2821,14 +3014,20 @@
           </a:ln>
         </p:spPr>
         <p:txBody>
-          <a:bodyPr xmlns:a="http://schemas.openxmlformats.org/drawingml/2006/main" lIns="0" tIns="0" rIns="0" bIns="0" anchor="ctr"/>
+          <a:bodyPr xmlns:a="http://schemas.openxmlformats.org/drawingml/2006/main" wrap="square" lIns="0" tIns="0" rIns="0" bIns="0" anchor="ctr">
+            <a:noAutofit/>
+          </a:bodyPr>
           <a:lstStyle xmlns:a="http://schemas.openxmlformats.org/drawingml/2006/main"/>
           <a:p xmlns:a="http://schemas.openxmlformats.org/drawingml/2006/main">
             <a:pPr>
+              <a:buNone/>
               <a:defRPr sz="1350" b="1">
                 <a:solidFill>
                   <a:srgbClr val="28685E"/>
                 </a:solidFill>
+                <a:latin typeface="Arial"/>
+                <a:ea typeface="Arial"/>
+                <a:cs typeface="Arial"/>
               </a:defRPr>
             </a:pPr>
             <a:r>
@@ -2836,6 +3035,9 @@
                 <a:solidFill>
                   <a:srgbClr val="28685E"/>
                 </a:solidFill>
+                <a:latin typeface="Arial"/>
+                <a:ea typeface="Arial"/>
+                <a:cs typeface="Arial"/>
               </a:rPr>
               <a:t>10</a:t>
             </a:r>
@@ -2858,8 +3060,8 @@
         </p:nvSpPr>
         <p:spPr>
           <a:xfrm xmlns:a="http://schemas.openxmlformats.org/drawingml/2006/main">
-            <a:off x="609600" y="2619375"/>
-            <a:ext cx="10972800" cy="781050"/>
+            <a:off x="609600" y="2305050"/>
+            <a:ext cx="10972800" cy="914400"/>
           </a:xfrm>
           <a:prstGeom xmlns:a="http://schemas.openxmlformats.org/drawingml/2006/main" prst="rect">
             <a:avLst/>
@@ -2871,14 +3073,20 @@
           </a:ln>
         </p:spPr>
         <p:txBody>
-          <a:bodyPr xmlns:a="http://schemas.openxmlformats.org/drawingml/2006/main" lIns="0" tIns="0" rIns="0" bIns="0" anchor="ctr"/>
+          <a:bodyPr xmlns:a="http://schemas.openxmlformats.org/drawingml/2006/main" wrap="square" lIns="0" tIns="0" rIns="0" bIns="0" anchor="ctr">
+            <a:noAutofit/>
+          </a:bodyPr>
           <a:lstStyle xmlns:a="http://schemas.openxmlformats.org/drawingml/2006/main"/>
           <a:p xmlns:a="http://schemas.openxmlformats.org/drawingml/2006/main">
             <a:pPr>
+              <a:buNone/>
               <a:defRPr sz="2550" b="0">
                 <a:solidFill>
                   <a:srgbClr val="152B3A"/>
                 </a:solidFill>
+                <a:latin typeface="Arial"/>
+                <a:ea typeface="Arial"/>
+                <a:cs typeface="Arial"/>
               </a:defRPr>
             </a:pPr>
             <a:r>
@@ -2886,6 +3094,9 @@
                 <a:solidFill>
                   <a:srgbClr val="152B3A"/>
                 </a:solidFill>
+                <a:latin typeface="Arial"/>
+                <a:ea typeface="Arial"/>
+                <a:cs typeface="Arial"/>
               </a:rPr>
               <a:t>Supported: point from food to eater.</a:t>
             </a:r>
@@ -2908,8 +3119,8 @@
         </p:nvSpPr>
         <p:spPr>
           <a:xfrm xmlns:a="http://schemas.openxmlformats.org/drawingml/2006/main">
-            <a:off x="609600" y="3476625"/>
-            <a:ext cx="10972800" cy="781050"/>
+            <a:off x="609600" y="3352800"/>
+            <a:ext cx="10972800" cy="914400"/>
           </a:xfrm>
           <a:prstGeom xmlns:a="http://schemas.openxmlformats.org/drawingml/2006/main" prst="rect">
             <a:avLst/>
@@ -2921,14 +3132,20 @@
           </a:ln>
         </p:spPr>
         <p:txBody>
-          <a:bodyPr xmlns:a="http://schemas.openxmlformats.org/drawingml/2006/main" lIns="0" tIns="0" rIns="0" bIns="0" anchor="ctr"/>
+          <a:bodyPr xmlns:a="http://schemas.openxmlformats.org/drawingml/2006/main" wrap="square" lIns="0" tIns="0" rIns="0" bIns="0" anchor="ctr">
+            <a:noAutofit/>
+          </a:bodyPr>
           <a:lstStyle xmlns:a="http://schemas.openxmlformats.org/drawingml/2006/main"/>
           <a:p xmlns:a="http://schemas.openxmlformats.org/drawingml/2006/main">
             <a:pPr>
+              <a:buNone/>
               <a:defRPr sz="2550" b="0">
                 <a:solidFill>
                   <a:srgbClr val="152B3A"/>
                 </a:solidFill>
+                <a:latin typeface="Arial"/>
+                <a:ea typeface="Arial"/>
+                <a:cs typeface="Arial"/>
               </a:defRPr>
             </a:pPr>
             <a:r>
@@ -2936,6 +3153,9 @@
                 <a:solidFill>
                   <a:srgbClr val="152B3A"/>
                 </a:solidFill>
+                <a:latin typeface="Arial"/>
+                <a:ea typeface="Arial"/>
+                <a:cs typeface="Arial"/>
               </a:rPr>
               <a:t>Standard: explain an indirect plant link.</a:t>
             </a:r>
@@ -2958,8 +3178,8 @@
         </p:nvSpPr>
         <p:spPr>
           <a:xfrm xmlns:a="http://schemas.openxmlformats.org/drawingml/2006/main">
-            <a:off x="609600" y="4333875"/>
-            <a:ext cx="10972800" cy="781050"/>
+            <a:off x="609600" y="4400550"/>
+            <a:ext cx="10972800" cy="914400"/>
           </a:xfrm>
           <a:prstGeom xmlns:a="http://schemas.openxmlformats.org/drawingml/2006/main" prst="rect">
             <a:avLst/>
@@ -2971,21 +3191,30 @@
           </a:ln>
         </p:spPr>
         <p:txBody>
-          <a:bodyPr xmlns:a="http://schemas.openxmlformats.org/drawingml/2006/main" lIns="0" tIns="0" rIns="0" bIns="0" anchor="ctr"/>
+          <a:bodyPr xmlns:a="http://schemas.openxmlformats.org/drawingml/2006/main" wrap="square" lIns="0" tIns="0" rIns="0" bIns="0" anchor="ctr">
+            <a:noAutofit/>
+          </a:bodyPr>
           <a:lstStyle xmlns:a="http://schemas.openxmlformats.org/drawingml/2006/main"/>
           <a:p xmlns:a="http://schemas.openxmlformats.org/drawingml/2006/main">
             <a:pPr>
-              <a:defRPr sz="2550" b="0">
-                <a:solidFill>
-                  <a:srgbClr val="152B3A"/>
-                </a:solidFill>
+              <a:buNone/>
+              <a:defRPr sz="2550" b="1">
+                <a:solidFill>
+                  <a:srgbClr val="28685E"/>
+                </a:solidFill>
+                <a:latin typeface="Arial"/>
+                <a:ea typeface="Arial"/>
+                <a:cs typeface="Arial"/>
               </a:defRPr>
             </a:pPr>
             <a:r>
-              <a:rPr sz="2550" b="0">
-                <a:solidFill>
-                  <a:srgbClr val="152B3A"/>
-                </a:solidFill>
+              <a:rPr sz="2550" b="1">
+                <a:solidFill>
+                  <a:srgbClr val="28685E"/>
+                </a:solidFill>
+                <a:latin typeface="Arial"/>
+                <a:ea typeface="Arial"/>
+                <a:cs typeface="Arial"/>
               </a:rPr>
               <a:t>Stretch: why can’t we predict exact numbers?</a:t>
             </a:r>
@@ -3008,7 +3237,7 @@
     <p:bg>
       <p:bgPr>
         <a:solidFill xmlns:a="http://schemas.openxmlformats.org/drawingml/2006/main">
-          <a:srgbClr val="F5F1E8"/>
+          <a:srgbClr val="FBF9F3"/>
         </a:solidFill>
       </p:bgPr>
     </p:bg>
@@ -3037,8 +3266,8 @@
         </p:nvSpPr>
         <p:spPr>
           <a:xfrm xmlns:a="http://schemas.openxmlformats.org/drawingml/2006/main">
-            <a:off x="609600" y="552450"/>
-            <a:ext cx="781050" cy="57150"/>
+            <a:off x="609600" y="742950"/>
+            <a:ext cx="9906000" cy="38100"/>
           </a:xfrm>
           <a:prstGeom xmlns:a="http://schemas.openxmlformats.org/drawingml/2006/main" prst="rect">
             <a:avLst/>
@@ -3068,8 +3297,8 @@
         </p:nvSpPr>
         <p:spPr>
           <a:xfrm xmlns:a="http://schemas.openxmlformats.org/drawingml/2006/main">
-            <a:off x="609600" y="762000"/>
-            <a:ext cx="9334500" cy="285750"/>
+            <a:off x="609600" y="342900"/>
+            <a:ext cx="9334500" cy="266700"/>
           </a:xfrm>
           <a:prstGeom xmlns:a="http://schemas.openxmlformats.org/drawingml/2006/main" prst="rect">
             <a:avLst/>
@@ -3081,21 +3310,30 @@
           </a:ln>
         </p:spPr>
         <p:txBody>
-          <a:bodyPr xmlns:a="http://schemas.openxmlformats.org/drawingml/2006/main" lIns="0" tIns="0" rIns="0" bIns="0" anchor="ctr"/>
+          <a:bodyPr xmlns:a="http://schemas.openxmlformats.org/drawingml/2006/main" wrap="square" lIns="0" tIns="0" rIns="0" bIns="0" anchor="ctr">
+            <a:noAutofit/>
+          </a:bodyPr>
           <a:lstStyle xmlns:a="http://schemas.openxmlformats.org/drawingml/2006/main"/>
           <a:p xmlns:a="http://schemas.openxmlformats.org/drawingml/2006/main">
             <a:pPr>
-              <a:defRPr sz="1500" b="1">
+              <a:buNone/>
+              <a:defRPr sz="1425" b="1">
                 <a:solidFill>
                   <a:srgbClr val="28685E"/>
                 </a:solidFill>
+                <a:latin typeface="Arial"/>
+                <a:ea typeface="Arial"/>
+                <a:cs typeface="Arial"/>
               </a:defRPr>
             </a:pPr>
             <a:r>
-              <a:rPr sz="1500" b="1">
+              <a:rPr sz="1425" b="1">
                 <a:solidFill>
                   <a:srgbClr val="28685E"/>
                 </a:solidFill>
+                <a:latin typeface="Arial"/>
+                <a:ea typeface="Arial"/>
+                <a:cs typeface="Arial"/>
               </a:rPr>
               <a:t>MADE BY MATT  /  BUILD SCIENCE</a:t>
             </a:r>
@@ -3104,14 +3342,14 @@
       </p:sp>
       <p:pic>
         <p:nvPicPr>
-          <p:cNvPr id="13" name=""/>
+          <p:cNvPr id="15" name=""/>
           <p:cNvPicPr>
             <a:picLocks xmlns:a="http://schemas.openxmlformats.org/drawingml/2006/main" noChangeAspect="1"/>
           </p:cNvPicPr>
           <p:nvPr/>
         </p:nvPicPr>
         <p:blipFill>
-          <a:blip xmlns:r="http://schemas.openxmlformats.org/officeDocument/2006/relationships" xmlns:a="http://schemas.openxmlformats.org/drawingml/2006/main" r:embed="Rbae1337e71ad450b"/>
+          <a:blip xmlns:r="http://schemas.openxmlformats.org/officeDocument/2006/relationships" xmlns:a="http://schemas.openxmlformats.org/drawingml/2006/main" r:embed="R7f3f451d3af1462c"/>
           <a:stretch xmlns:a="http://schemas.openxmlformats.org/drawingml/2006/main"/>
         </p:blipFill>
         <p:spPr>
@@ -3140,8 +3378,8 @@
         </p:nvSpPr>
         <p:spPr>
           <a:xfrm xmlns:a="http://schemas.openxmlformats.org/drawingml/2006/main">
-            <a:off x="609600" y="1352550"/>
-            <a:ext cx="10972800" cy="952500"/>
+            <a:off x="609600" y="1047750"/>
+            <a:ext cx="10972800" cy="895350"/>
           </a:xfrm>
           <a:prstGeom xmlns:a="http://schemas.openxmlformats.org/drawingml/2006/main" prst="rect">
             <a:avLst/>
@@ -3153,21 +3391,30 @@
           </a:ln>
         </p:spPr>
         <p:txBody>
-          <a:bodyPr xmlns:a="http://schemas.openxmlformats.org/drawingml/2006/main" lIns="0" tIns="0" rIns="0" bIns="0" anchor="ctr"/>
+          <a:bodyPr xmlns:a="http://schemas.openxmlformats.org/drawingml/2006/main" wrap="square" lIns="0" tIns="0" rIns="0" bIns="0" anchor="ctr">
+            <a:noAutofit/>
+          </a:bodyPr>
           <a:lstStyle xmlns:a="http://schemas.openxmlformats.org/drawingml/2006/main"/>
           <a:p xmlns:a="http://schemas.openxmlformats.org/drawingml/2006/main">
             <a:pPr>
-              <a:defRPr sz="3750" b="1">
+              <a:buNone/>
+              <a:defRPr sz="3600" b="1">
                 <a:solidFill>
                   <a:srgbClr val="152B3A"/>
                 </a:solidFill>
+                <a:latin typeface="Arial"/>
+                <a:ea typeface="Arial"/>
+                <a:cs typeface="Arial"/>
               </a:defRPr>
             </a:pPr>
             <a:r>
-              <a:rPr sz="3750" b="1">
+              <a:rPr sz="3600" b="1">
                 <a:solidFill>
                   <a:srgbClr val="152B3A"/>
                 </a:solidFill>
+                <a:latin typeface="Arial"/>
+                <a:ea typeface="Arial"/>
+                <a:cs typeface="Arial"/>
               </a:rPr>
               <a:t>Retrieve a chain and read one arrow</a:t>
             </a:r>
@@ -3234,21 +3481,30 @@
           </a:ln>
         </p:spPr>
         <p:txBody>
-          <a:bodyPr xmlns:a="http://schemas.openxmlformats.org/drawingml/2006/main" lIns="0" tIns="0" rIns="0" bIns="0" anchor="ctr"/>
+          <a:bodyPr xmlns:a="http://schemas.openxmlformats.org/drawingml/2006/main" wrap="square" lIns="0" tIns="0" rIns="0" bIns="0" anchor="ctr">
+            <a:noAutofit/>
+          </a:bodyPr>
           <a:lstStyle xmlns:a="http://schemas.openxmlformats.org/drawingml/2006/main"/>
           <a:p xmlns:a="http://schemas.openxmlformats.org/drawingml/2006/main">
             <a:pPr>
-              <a:defRPr sz="1275" b="0">
+              <a:buNone/>
+              <a:defRPr sz="1200" b="0">
                 <a:solidFill>
                   <a:srgbClr val="50616B"/>
                 </a:solidFill>
+                <a:latin typeface="Arial"/>
+                <a:ea typeface="Arial"/>
+                <a:cs typeface="Arial"/>
               </a:defRPr>
             </a:pPr>
             <a:r>
-              <a:rPr sz="1275" b="0">
+              <a:rPr sz="1200" b="0">
                 <a:solidFill>
                   <a:srgbClr val="50616B"/>
                 </a:solidFill>
+                <a:latin typeface="Arial"/>
+                <a:ea typeface="Arial"/>
+                <a:cs typeface="Arial"/>
               </a:rPr>
               <a:t>AUTUMN 1  ·  WEEK 7  ·  LESSON B</a:t>
             </a:r>
@@ -3284,14 +3540,20 @@
           </a:ln>
         </p:spPr>
         <p:txBody>
-          <a:bodyPr xmlns:a="http://schemas.openxmlformats.org/drawingml/2006/main" lIns="0" tIns="0" rIns="0" bIns="0" anchor="ctr"/>
+          <a:bodyPr xmlns:a="http://schemas.openxmlformats.org/drawingml/2006/main" wrap="square" lIns="0" tIns="0" rIns="0" bIns="0" anchor="ctr">
+            <a:noAutofit/>
+          </a:bodyPr>
           <a:lstStyle xmlns:a="http://schemas.openxmlformats.org/drawingml/2006/main"/>
           <a:p xmlns:a="http://schemas.openxmlformats.org/drawingml/2006/main">
             <a:pPr>
+              <a:buNone/>
               <a:defRPr sz="1350" b="1">
                 <a:solidFill>
                   <a:srgbClr val="28685E"/>
                 </a:solidFill>
+                <a:latin typeface="Arial"/>
+                <a:ea typeface="Arial"/>
+                <a:cs typeface="Arial"/>
               </a:defRPr>
             </a:pPr>
             <a:r>
@@ -3299,6 +3561,9 @@
                 <a:solidFill>
                   <a:srgbClr val="28685E"/>
                 </a:solidFill>
+                <a:latin typeface="Arial"/>
+                <a:ea typeface="Arial"/>
+                <a:cs typeface="Arial"/>
               </a:rPr>
               <a:t>02</a:t>
             </a:r>
@@ -3321,8 +3586,8 @@
         </p:nvSpPr>
         <p:spPr>
           <a:xfrm xmlns:a="http://schemas.openxmlformats.org/drawingml/2006/main">
-            <a:off x="609600" y="2619375"/>
-            <a:ext cx="10972800" cy="781050"/>
+            <a:off x="609600" y="2305050"/>
+            <a:ext cx="10972800" cy="914400"/>
           </a:xfrm>
           <a:prstGeom xmlns:a="http://schemas.openxmlformats.org/drawingml/2006/main" prst="rect">
             <a:avLst/>
@@ -3334,14 +3599,20 @@
           </a:ln>
         </p:spPr>
         <p:txBody>
-          <a:bodyPr xmlns:a="http://schemas.openxmlformats.org/drawingml/2006/main" lIns="0" tIns="0" rIns="0" bIns="0" anchor="ctr"/>
+          <a:bodyPr xmlns:a="http://schemas.openxmlformats.org/drawingml/2006/main" wrap="square" lIns="0" tIns="0" rIns="0" bIns="0" anchor="ctr">
+            <a:noAutofit/>
+          </a:bodyPr>
           <a:lstStyle xmlns:a="http://schemas.openxmlformats.org/drawingml/2006/main"/>
           <a:p xmlns:a="http://schemas.openxmlformats.org/drawingml/2006/main">
             <a:pPr>
+              <a:buNone/>
               <a:defRPr sz="2550" b="0">
                 <a:solidFill>
                   <a:srgbClr val="152B3A"/>
                 </a:solidFill>
+                <a:latin typeface="Arial"/>
+                <a:ea typeface="Arial"/>
+                <a:cs typeface="Arial"/>
               </a:defRPr>
             </a:pPr>
             <a:r>
@@ -3349,6 +3620,9 @@
                 <a:solidFill>
                   <a:srgbClr val="152B3A"/>
                 </a:solidFill>
+                <a:latin typeface="Arial"/>
+                <a:ea typeface="Arial"/>
+                <a:cs typeface="Arial"/>
               </a:rPr>
               <a:t>Find Monday’s three-organism chain.</a:t>
             </a:r>
@@ -3371,8 +3645,8 @@
         </p:nvSpPr>
         <p:spPr>
           <a:xfrm xmlns:a="http://schemas.openxmlformats.org/drawingml/2006/main">
-            <a:off x="609600" y="3476625"/>
-            <a:ext cx="10972800" cy="781050"/>
+            <a:off x="609600" y="3352800"/>
+            <a:ext cx="10972800" cy="914400"/>
           </a:xfrm>
           <a:prstGeom xmlns:a="http://schemas.openxmlformats.org/drawingml/2006/main" prst="rect">
             <a:avLst/>
@@ -3384,14 +3658,20 @@
           </a:ln>
         </p:spPr>
         <p:txBody>
-          <a:bodyPr xmlns:a="http://schemas.openxmlformats.org/drawingml/2006/main" lIns="0" tIns="0" rIns="0" bIns="0" anchor="ctr"/>
+          <a:bodyPr xmlns:a="http://schemas.openxmlformats.org/drawingml/2006/main" wrap="square" lIns="0" tIns="0" rIns="0" bIns="0" anchor="ctr">
+            <a:noAutofit/>
+          </a:bodyPr>
           <a:lstStyle xmlns:a="http://schemas.openxmlformats.org/drawingml/2006/main"/>
           <a:p xmlns:a="http://schemas.openxmlformats.org/drawingml/2006/main">
             <a:pPr>
+              <a:buNone/>
               <a:defRPr sz="2550" b="0">
                 <a:solidFill>
                   <a:srgbClr val="152B3A"/>
                 </a:solidFill>
+                <a:latin typeface="Arial"/>
+                <a:ea typeface="Arial"/>
+                <a:cs typeface="Arial"/>
               </a:defRPr>
             </a:pPr>
             <a:r>
@@ -3399,6 +3679,9 @@
                 <a:solidFill>
                   <a:srgbClr val="152B3A"/>
                 </a:solidFill>
+                <a:latin typeface="Arial"/>
+                <a:ea typeface="Arial"/>
+                <a:cs typeface="Arial"/>
               </a:rPr>
               <a:t>Follow one arrow from food to eater.</a:t>
             </a:r>
@@ -3421,8 +3704,8 @@
         </p:nvSpPr>
         <p:spPr>
           <a:xfrm xmlns:a="http://schemas.openxmlformats.org/drawingml/2006/main">
-            <a:off x="609600" y="4333875"/>
-            <a:ext cx="10972800" cy="781050"/>
+            <a:off x="609600" y="4400550"/>
+            <a:ext cx="10972800" cy="914400"/>
           </a:xfrm>
           <a:prstGeom xmlns:a="http://schemas.openxmlformats.org/drawingml/2006/main" prst="rect">
             <a:avLst/>
@@ -3434,21 +3717,30 @@
           </a:ln>
         </p:spPr>
         <p:txBody>
-          <a:bodyPr xmlns:a="http://schemas.openxmlformats.org/drawingml/2006/main" lIns="0" tIns="0" rIns="0" bIns="0" anchor="ctr"/>
+          <a:bodyPr xmlns:a="http://schemas.openxmlformats.org/drawingml/2006/main" wrap="square" lIns="0" tIns="0" rIns="0" bIns="0" anchor="ctr">
+            <a:noAutofit/>
+          </a:bodyPr>
           <a:lstStyle xmlns:a="http://schemas.openxmlformats.org/drawingml/2006/main"/>
           <a:p xmlns:a="http://schemas.openxmlformats.org/drawingml/2006/main">
             <a:pPr>
-              <a:defRPr sz="2550" b="0">
-                <a:solidFill>
-                  <a:srgbClr val="152B3A"/>
-                </a:solidFill>
+              <a:buNone/>
+              <a:defRPr sz="2550" b="1">
+                <a:solidFill>
+                  <a:srgbClr val="28685E"/>
+                </a:solidFill>
+                <a:latin typeface="Arial"/>
+                <a:ea typeface="Arial"/>
+                <a:cs typeface="Arial"/>
               </a:defRPr>
             </a:pPr>
             <a:r>
-              <a:rPr sz="2550" b="0">
-                <a:solidFill>
-                  <a:srgbClr val="152B3A"/>
-                </a:solidFill>
+              <a:rPr sz="2550" b="1">
+                <a:solidFill>
+                  <a:srgbClr val="28685E"/>
+                </a:solidFill>
+                <a:latin typeface="Arial"/>
+                <a:ea typeface="Arial"/>
+                <a:cs typeface="Arial"/>
               </a:rPr>
               <a:t>Use the feeding clue to check it.</a:t>
             </a:r>
@@ -3471,7 +3763,7 @@
     <p:bg>
       <p:bgPr>
         <a:solidFill xmlns:a="http://schemas.openxmlformats.org/drawingml/2006/main">
-          <a:srgbClr val="F5F1E8"/>
+          <a:srgbClr val="FBF9F3"/>
         </a:solidFill>
       </p:bgPr>
     </p:bg>
@@ -3500,8 +3792,8 @@
         </p:nvSpPr>
         <p:spPr>
           <a:xfrm xmlns:a="http://schemas.openxmlformats.org/drawingml/2006/main">
-            <a:off x="609600" y="552450"/>
-            <a:ext cx="781050" cy="57150"/>
+            <a:off x="609600" y="742950"/>
+            <a:ext cx="9906000" cy="38100"/>
           </a:xfrm>
           <a:prstGeom xmlns:a="http://schemas.openxmlformats.org/drawingml/2006/main" prst="rect">
             <a:avLst/>
@@ -3531,8 +3823,8 @@
         </p:nvSpPr>
         <p:spPr>
           <a:xfrm xmlns:a="http://schemas.openxmlformats.org/drawingml/2006/main">
-            <a:off x="609600" y="762000"/>
-            <a:ext cx="9334500" cy="285750"/>
+            <a:off x="609600" y="342900"/>
+            <a:ext cx="9334500" cy="266700"/>
           </a:xfrm>
           <a:prstGeom xmlns:a="http://schemas.openxmlformats.org/drawingml/2006/main" prst="rect">
             <a:avLst/>
@@ -3544,21 +3836,30 @@
           </a:ln>
         </p:spPr>
         <p:txBody>
-          <a:bodyPr xmlns:a="http://schemas.openxmlformats.org/drawingml/2006/main" lIns="0" tIns="0" rIns="0" bIns="0" anchor="ctr"/>
+          <a:bodyPr xmlns:a="http://schemas.openxmlformats.org/drawingml/2006/main" wrap="square" lIns="0" tIns="0" rIns="0" bIns="0" anchor="ctr">
+            <a:noAutofit/>
+          </a:bodyPr>
           <a:lstStyle xmlns:a="http://schemas.openxmlformats.org/drawingml/2006/main"/>
           <a:p xmlns:a="http://schemas.openxmlformats.org/drawingml/2006/main">
             <a:pPr>
-              <a:defRPr sz="1500" b="1">
+              <a:buNone/>
+              <a:defRPr sz="1425" b="1">
                 <a:solidFill>
                   <a:srgbClr val="28685E"/>
                 </a:solidFill>
+                <a:latin typeface="Arial"/>
+                <a:ea typeface="Arial"/>
+                <a:cs typeface="Arial"/>
               </a:defRPr>
             </a:pPr>
             <a:r>
-              <a:rPr sz="1500" b="1">
+              <a:rPr sz="1425" b="1">
                 <a:solidFill>
                   <a:srgbClr val="28685E"/>
                 </a:solidFill>
+                <a:latin typeface="Arial"/>
+                <a:ea typeface="Arial"/>
+                <a:cs typeface="Arial"/>
               </a:rPr>
               <a:t>MADE BY MATT  /  BUILD SCIENCE</a:t>
             </a:r>
@@ -3567,14 +3868,14 @@
       </p:sp>
       <p:pic>
         <p:nvPicPr>
-          <p:cNvPr id="14" name=""/>
+          <p:cNvPr id="19" name=""/>
           <p:cNvPicPr>
             <a:picLocks xmlns:a="http://schemas.openxmlformats.org/drawingml/2006/main" noChangeAspect="1"/>
           </p:cNvPicPr>
           <p:nvPr/>
         </p:nvPicPr>
         <p:blipFill>
-          <a:blip xmlns:r="http://schemas.openxmlformats.org/officeDocument/2006/relationships" xmlns:a="http://schemas.openxmlformats.org/drawingml/2006/main" r:embed="R71c43a42bfae4d34"/>
+          <a:blip xmlns:r="http://schemas.openxmlformats.org/officeDocument/2006/relationships" xmlns:a="http://schemas.openxmlformats.org/drawingml/2006/main" r:embed="R29ddecce1cfa4ddc"/>
           <a:stretch xmlns:a="http://schemas.openxmlformats.org/drawingml/2006/main"/>
         </p:blipFill>
         <p:spPr>
@@ -3603,8 +3904,8 @@
         </p:nvSpPr>
         <p:spPr>
           <a:xfrm xmlns:a="http://schemas.openxmlformats.org/drawingml/2006/main">
-            <a:off x="609600" y="1352550"/>
-            <a:ext cx="10972800" cy="952500"/>
+            <a:off x="609600" y="1047750"/>
+            <a:ext cx="10972800" cy="895350"/>
           </a:xfrm>
           <a:prstGeom xmlns:a="http://schemas.openxmlformats.org/drawingml/2006/main" prst="rect">
             <a:avLst/>
@@ -3616,21 +3917,30 @@
           </a:ln>
         </p:spPr>
         <p:txBody>
-          <a:bodyPr xmlns:a="http://schemas.openxmlformats.org/drawingml/2006/main" lIns="0" tIns="0" rIns="0" bIns="0" anchor="ctr"/>
+          <a:bodyPr xmlns:a="http://schemas.openxmlformats.org/drawingml/2006/main" wrap="square" lIns="0" tIns="0" rIns="0" bIns="0" anchor="ctr">
+            <a:noAutofit/>
+          </a:bodyPr>
           <a:lstStyle xmlns:a="http://schemas.openxmlformats.org/drawingml/2006/main"/>
           <a:p xmlns:a="http://schemas.openxmlformats.org/drawingml/2006/main">
             <a:pPr>
-              <a:defRPr sz="3750" b="1">
+              <a:buNone/>
+              <a:defRPr sz="3600" b="1">
                 <a:solidFill>
                   <a:srgbClr val="152B3A"/>
                 </a:solidFill>
+                <a:latin typeface="Arial"/>
+                <a:ea typeface="Arial"/>
+                <a:cs typeface="Arial"/>
               </a:defRPr>
             </a:pPr>
             <a:r>
-              <a:rPr sz="3750" b="1">
+              <a:rPr sz="3600" b="1">
                 <a:solidFill>
                   <a:srgbClr val="152B3A"/>
                 </a:solidFill>
+                <a:latin typeface="Arial"/>
+                <a:ea typeface="Arial"/>
+                <a:cs typeface="Arial"/>
               </a:rPr>
               <a:t>Build the grass chain from evidence</a:t>
             </a:r>
@@ -3697,21 +4007,30 @@
           </a:ln>
         </p:spPr>
         <p:txBody>
-          <a:bodyPr xmlns:a="http://schemas.openxmlformats.org/drawingml/2006/main" lIns="0" tIns="0" rIns="0" bIns="0" anchor="ctr"/>
+          <a:bodyPr xmlns:a="http://schemas.openxmlformats.org/drawingml/2006/main" wrap="square" lIns="0" tIns="0" rIns="0" bIns="0" anchor="ctr">
+            <a:noAutofit/>
+          </a:bodyPr>
           <a:lstStyle xmlns:a="http://schemas.openxmlformats.org/drawingml/2006/main"/>
           <a:p xmlns:a="http://schemas.openxmlformats.org/drawingml/2006/main">
             <a:pPr>
-              <a:defRPr sz="1275" b="0">
+              <a:buNone/>
+              <a:defRPr sz="1200" b="0">
                 <a:solidFill>
                   <a:srgbClr val="50616B"/>
                 </a:solidFill>
+                <a:latin typeface="Arial"/>
+                <a:ea typeface="Arial"/>
+                <a:cs typeface="Arial"/>
               </a:defRPr>
             </a:pPr>
             <a:r>
-              <a:rPr sz="1275" b="0">
+              <a:rPr sz="1200" b="0">
                 <a:solidFill>
                   <a:srgbClr val="50616B"/>
                 </a:solidFill>
+                <a:latin typeface="Arial"/>
+                <a:ea typeface="Arial"/>
+                <a:cs typeface="Arial"/>
               </a:rPr>
               <a:t>AUTUMN 1  ·  WEEK 7  ·  LESSON B</a:t>
             </a:r>
@@ -3747,14 +4066,20 @@
           </a:ln>
         </p:spPr>
         <p:txBody>
-          <a:bodyPr xmlns:a="http://schemas.openxmlformats.org/drawingml/2006/main" lIns="0" tIns="0" rIns="0" bIns="0" anchor="ctr"/>
+          <a:bodyPr xmlns:a="http://schemas.openxmlformats.org/drawingml/2006/main" wrap="square" lIns="0" tIns="0" rIns="0" bIns="0" anchor="ctr">
+            <a:noAutofit/>
+          </a:bodyPr>
           <a:lstStyle xmlns:a="http://schemas.openxmlformats.org/drawingml/2006/main"/>
           <a:p xmlns:a="http://schemas.openxmlformats.org/drawingml/2006/main">
             <a:pPr>
+              <a:buNone/>
               <a:defRPr sz="1350" b="1">
                 <a:solidFill>
                   <a:srgbClr val="28685E"/>
                 </a:solidFill>
+                <a:latin typeface="Arial"/>
+                <a:ea typeface="Arial"/>
+                <a:cs typeface="Arial"/>
               </a:defRPr>
             </a:pPr>
             <a:r>
@@ -3762,6 +4087,9 @@
                 <a:solidFill>
                   <a:srgbClr val="28685E"/>
                 </a:solidFill>
+                <a:latin typeface="Arial"/>
+                <a:ea typeface="Arial"/>
+                <a:cs typeface="Arial"/>
               </a:rPr>
               <a:t>03</a:t>
             </a:r>
@@ -3784,8 +4112,8 @@
         </p:nvSpPr>
         <p:spPr>
           <a:xfrm xmlns:a="http://schemas.openxmlformats.org/drawingml/2006/main">
-            <a:off x="609600" y="2619375"/>
-            <a:ext cx="10972800" cy="714375"/>
+            <a:off x="609600" y="2305050"/>
+            <a:ext cx="7096125" cy="704850"/>
           </a:xfrm>
           <a:prstGeom xmlns:a="http://schemas.openxmlformats.org/drawingml/2006/main" prst="rect">
             <a:avLst/>
@@ -3797,14 +4125,20 @@
           </a:ln>
         </p:spPr>
         <p:txBody>
-          <a:bodyPr xmlns:a="http://schemas.openxmlformats.org/drawingml/2006/main" lIns="0" tIns="0" rIns="0" bIns="0" anchor="ctr"/>
+          <a:bodyPr xmlns:a="http://schemas.openxmlformats.org/drawingml/2006/main" wrap="square" lIns="0" tIns="0" rIns="0" bIns="0" anchor="ctr">
+            <a:noAutofit/>
+          </a:bodyPr>
           <a:lstStyle xmlns:a="http://schemas.openxmlformats.org/drawingml/2006/main"/>
           <a:p xmlns:a="http://schemas.openxmlformats.org/drawingml/2006/main">
             <a:pPr>
+              <a:buNone/>
               <a:defRPr sz="2550" b="0">
                 <a:solidFill>
                   <a:srgbClr val="152B3A"/>
                 </a:solidFill>
+                <a:latin typeface="Arial"/>
+                <a:ea typeface="Arial"/>
+                <a:cs typeface="Arial"/>
               </a:defRPr>
             </a:pPr>
             <a:r>
@@ -3812,6 +4146,9 @@
                 <a:solidFill>
                   <a:srgbClr val="152B3A"/>
                 </a:solidFill>
+                <a:latin typeface="Arial"/>
+                <a:ea typeface="Arial"/>
+                <a:cs typeface="Arial"/>
               </a:rPr>
               <a:t>A rabbit can eat grass.</a:t>
             </a:r>
@@ -3834,8 +4171,8 @@
         </p:nvSpPr>
         <p:spPr>
           <a:xfrm xmlns:a="http://schemas.openxmlformats.org/drawingml/2006/main">
-            <a:off x="609600" y="3409950"/>
-            <a:ext cx="10972800" cy="714375"/>
+            <a:off x="609600" y="3143250"/>
+            <a:ext cx="7096125" cy="704850"/>
           </a:xfrm>
           <a:prstGeom xmlns:a="http://schemas.openxmlformats.org/drawingml/2006/main" prst="rect">
             <a:avLst/>
@@ -3847,14 +4184,20 @@
           </a:ln>
         </p:spPr>
         <p:txBody>
-          <a:bodyPr xmlns:a="http://schemas.openxmlformats.org/drawingml/2006/main" lIns="0" tIns="0" rIns="0" bIns="0" anchor="ctr"/>
+          <a:bodyPr xmlns:a="http://schemas.openxmlformats.org/drawingml/2006/main" wrap="square" lIns="0" tIns="0" rIns="0" bIns="0" anchor="ctr">
+            <a:noAutofit/>
+          </a:bodyPr>
           <a:lstStyle xmlns:a="http://schemas.openxmlformats.org/drawingml/2006/main"/>
           <a:p xmlns:a="http://schemas.openxmlformats.org/drawingml/2006/main">
             <a:pPr>
+              <a:buNone/>
               <a:defRPr sz="2550" b="0">
                 <a:solidFill>
                   <a:srgbClr val="152B3A"/>
                 </a:solidFill>
+                <a:latin typeface="Arial"/>
+                <a:ea typeface="Arial"/>
+                <a:cs typeface="Arial"/>
               </a:defRPr>
             </a:pPr>
             <a:r>
@@ -3862,6 +4205,9 @@
                 <a:solidFill>
                   <a:srgbClr val="152B3A"/>
                 </a:solidFill>
+                <a:latin typeface="Arial"/>
+                <a:ea typeface="Arial"/>
+                <a:cs typeface="Arial"/>
               </a:rPr>
               <a:t>A fox can eat a rabbit.</a:t>
             </a:r>
@@ -3884,8 +4230,8 @@
         </p:nvSpPr>
         <p:spPr>
           <a:xfrm xmlns:a="http://schemas.openxmlformats.org/drawingml/2006/main">
-            <a:off x="609600" y="4200525"/>
-            <a:ext cx="10972800" cy="714375"/>
+            <a:off x="609600" y="3981450"/>
+            <a:ext cx="7096125" cy="704850"/>
           </a:xfrm>
           <a:prstGeom xmlns:a="http://schemas.openxmlformats.org/drawingml/2006/main" prst="rect">
             <a:avLst/>
@@ -3897,14 +4243,20 @@
           </a:ln>
         </p:spPr>
         <p:txBody>
-          <a:bodyPr xmlns:a="http://schemas.openxmlformats.org/drawingml/2006/main" lIns="0" tIns="0" rIns="0" bIns="0" anchor="ctr"/>
+          <a:bodyPr xmlns:a="http://schemas.openxmlformats.org/drawingml/2006/main" wrap="square" lIns="0" tIns="0" rIns="0" bIns="0" anchor="ctr">
+            <a:noAutofit/>
+          </a:bodyPr>
           <a:lstStyle xmlns:a="http://schemas.openxmlformats.org/drawingml/2006/main"/>
           <a:p xmlns:a="http://schemas.openxmlformats.org/drawingml/2006/main">
             <a:pPr>
+              <a:buNone/>
               <a:defRPr sz="2550" b="0">
                 <a:solidFill>
                   <a:srgbClr val="152B3A"/>
                 </a:solidFill>
+                <a:latin typeface="Arial"/>
+                <a:ea typeface="Arial"/>
+                <a:cs typeface="Arial"/>
               </a:defRPr>
             </a:pPr>
             <a:r>
@@ -3912,6 +4264,9 @@
                 <a:solidFill>
                   <a:srgbClr val="152B3A"/>
                 </a:solidFill>
+                <a:latin typeface="Arial"/>
+                <a:ea typeface="Arial"/>
+                <a:cs typeface="Arial"/>
               </a:rPr>
               <a:t>Place grass, rabbit, fox and two arrows.</a:t>
             </a:r>
@@ -3934,8 +4289,8 @@
         </p:nvSpPr>
         <p:spPr>
           <a:xfrm xmlns:a="http://schemas.openxmlformats.org/drawingml/2006/main">
-            <a:off x="609600" y="4991100"/>
-            <a:ext cx="10972800" cy="714375"/>
+            <a:off x="609600" y="4819650"/>
+            <a:ext cx="7096125" cy="704850"/>
           </a:xfrm>
           <a:prstGeom xmlns:a="http://schemas.openxmlformats.org/drawingml/2006/main" prst="rect">
             <a:avLst/>
@@ -3947,27 +4302,102 @@
           </a:ln>
         </p:spPr>
         <p:txBody>
-          <a:bodyPr xmlns:a="http://schemas.openxmlformats.org/drawingml/2006/main" lIns="0" tIns="0" rIns="0" bIns="0" anchor="ctr"/>
+          <a:bodyPr xmlns:a="http://schemas.openxmlformats.org/drawingml/2006/main" wrap="square" lIns="0" tIns="0" rIns="0" bIns="0" anchor="ctr">
+            <a:noAutofit/>
+          </a:bodyPr>
           <a:lstStyle xmlns:a="http://schemas.openxmlformats.org/drawingml/2006/main"/>
           <a:p xmlns:a="http://schemas.openxmlformats.org/drawingml/2006/main">
             <a:pPr>
-              <a:defRPr sz="2550" b="0">
-                <a:solidFill>
-                  <a:srgbClr val="152B3A"/>
-                </a:solidFill>
+              <a:buNone/>
+              <a:defRPr sz="2550" b="1">
+                <a:solidFill>
+                  <a:srgbClr val="28685E"/>
+                </a:solidFill>
+                <a:latin typeface="Arial"/>
+                <a:ea typeface="Arial"/>
+                <a:cs typeface="Arial"/>
               </a:defRPr>
             </a:pPr>
             <a:r>
-              <a:rPr sz="2550" b="0">
-                <a:solidFill>
-                  <a:srgbClr val="152B3A"/>
-                </a:solidFill>
+              <a:rPr sz="2550" b="1">
+                <a:solidFill>
+                  <a:srgbClr val="28685E"/>
+                </a:solidFill>
+                <a:latin typeface="Arial"/>
+                <a:ea typeface="Arial"/>
+                <a:cs typeface="Arial"/>
               </a:rPr>
               <a:t>Add producer and consumer labels.</a:t>
             </a:r>
           </a:p>
         </p:txBody>
       </p:sp>
+      <p:pic>
+        <p:nvPicPr>
+          <p:cNvPr id="28" name=""/>
+          <p:cNvPicPr>
+            <a:picLocks xmlns:a="http://schemas.openxmlformats.org/drawingml/2006/main" noChangeAspect="1"/>
+          </p:cNvPicPr>
+          <p:nvPr/>
+        </p:nvPicPr>
+        <p:blipFill>
+          <a:blip xmlns:r="http://schemas.openxmlformats.org/officeDocument/2006/relationships" xmlns:a="http://schemas.openxmlformats.org/drawingml/2006/main" r:embed="R94ae2f006cb6402e"/>
+          <a:stretch xmlns:a="http://schemas.openxmlformats.org/drawingml/2006/main"/>
+        </p:blipFill>
+        <p:spPr>
+          <a:xfrm xmlns:a="http://schemas.openxmlformats.org/drawingml/2006/main">
+            <a:off x="9482138" y="2381250"/>
+            <a:ext cx="752475" cy="952500"/>
+          </a:xfrm>
+          <a:prstGeom xmlns:a="http://schemas.openxmlformats.org/drawingml/2006/main" prst="rect">
+            <a:avLst/>
+          </a:prstGeom>
+        </p:spPr>
+      </p:pic>
+      <p:pic>
+        <p:nvPicPr>
+          <p:cNvPr id="29" name=""/>
+          <p:cNvPicPr>
+            <a:picLocks xmlns:a="http://schemas.openxmlformats.org/drawingml/2006/main" noChangeAspect="1"/>
+          </p:cNvPicPr>
+          <p:nvPr/>
+        </p:nvPicPr>
+        <p:blipFill>
+          <a:blip xmlns:r="http://schemas.openxmlformats.org/officeDocument/2006/relationships" xmlns:a="http://schemas.openxmlformats.org/drawingml/2006/main" r:embed="R28889f69da6c4cd3"/>
+          <a:stretch xmlns:a="http://schemas.openxmlformats.org/drawingml/2006/main"/>
+        </p:blipFill>
+        <p:spPr>
+          <a:xfrm xmlns:a="http://schemas.openxmlformats.org/drawingml/2006/main">
+            <a:off x="9436100" y="3524250"/>
+            <a:ext cx="844550" cy="952500"/>
+          </a:xfrm>
+          <a:prstGeom xmlns:a="http://schemas.openxmlformats.org/drawingml/2006/main" prst="rect">
+            <a:avLst/>
+          </a:prstGeom>
+        </p:spPr>
+      </p:pic>
+      <p:pic>
+        <p:nvPicPr>
+          <p:cNvPr id="30" name=""/>
+          <p:cNvPicPr>
+            <a:picLocks xmlns:a="http://schemas.openxmlformats.org/drawingml/2006/main" noChangeAspect="1"/>
+          </p:cNvPicPr>
+          <p:nvPr/>
+        </p:nvPicPr>
+        <p:blipFill>
+          <a:blip xmlns:r="http://schemas.openxmlformats.org/officeDocument/2006/relationships" xmlns:a="http://schemas.openxmlformats.org/drawingml/2006/main" r:embed="R976bfc63e6064139"/>
+          <a:stretch xmlns:a="http://schemas.openxmlformats.org/drawingml/2006/main"/>
+        </p:blipFill>
+        <p:spPr>
+          <a:xfrm xmlns:a="http://schemas.openxmlformats.org/drawingml/2006/main">
+            <a:off x="9026497" y="4667250"/>
+            <a:ext cx="1663755" cy="952500"/>
+          </a:xfrm>
+          <a:prstGeom xmlns:a="http://schemas.openxmlformats.org/drawingml/2006/main" prst="rect">
+            <a:avLst/>
+          </a:prstGeom>
+        </p:spPr>
+      </p:pic>
     </p:spTree>
     <p:extLst>
       <p:ext uri="{BB962C8B-B14F-4D97-AF65-F5344CB8AC3E}">
@@ -3984,7 +4414,7 @@
     <p:bg>
       <p:bgPr>
         <a:solidFill xmlns:a="http://schemas.openxmlformats.org/drawingml/2006/main">
-          <a:srgbClr val="F5F1E8"/>
+          <a:srgbClr val="FBF9F3"/>
         </a:solidFill>
       </p:bgPr>
     </p:bg>
@@ -4013,8 +4443,8 @@
         </p:nvSpPr>
         <p:spPr>
           <a:xfrm xmlns:a="http://schemas.openxmlformats.org/drawingml/2006/main">
-            <a:off x="609600" y="552450"/>
-            <a:ext cx="781050" cy="57150"/>
+            <a:off x="609600" y="742950"/>
+            <a:ext cx="9906000" cy="38100"/>
           </a:xfrm>
           <a:prstGeom xmlns:a="http://schemas.openxmlformats.org/drawingml/2006/main" prst="rect">
             <a:avLst/>
@@ -4044,8 +4474,8 @@
         </p:nvSpPr>
         <p:spPr>
           <a:xfrm xmlns:a="http://schemas.openxmlformats.org/drawingml/2006/main">
-            <a:off x="609600" y="762000"/>
-            <a:ext cx="9334500" cy="285750"/>
+            <a:off x="609600" y="342900"/>
+            <a:ext cx="9334500" cy="266700"/>
           </a:xfrm>
           <a:prstGeom xmlns:a="http://schemas.openxmlformats.org/drawingml/2006/main" prst="rect">
             <a:avLst/>
@@ -4057,21 +4487,30 @@
           </a:ln>
         </p:spPr>
         <p:txBody>
-          <a:bodyPr xmlns:a="http://schemas.openxmlformats.org/drawingml/2006/main" lIns="0" tIns="0" rIns="0" bIns="0" anchor="ctr"/>
+          <a:bodyPr xmlns:a="http://schemas.openxmlformats.org/drawingml/2006/main" wrap="square" lIns="0" tIns="0" rIns="0" bIns="0" anchor="ctr">
+            <a:noAutofit/>
+          </a:bodyPr>
           <a:lstStyle xmlns:a="http://schemas.openxmlformats.org/drawingml/2006/main"/>
           <a:p xmlns:a="http://schemas.openxmlformats.org/drawingml/2006/main">
             <a:pPr>
-              <a:defRPr sz="1500" b="1">
+              <a:buNone/>
+              <a:defRPr sz="1425" b="1">
                 <a:solidFill>
                   <a:srgbClr val="28685E"/>
                 </a:solidFill>
+                <a:latin typeface="Arial"/>
+                <a:ea typeface="Arial"/>
+                <a:cs typeface="Arial"/>
               </a:defRPr>
             </a:pPr>
             <a:r>
-              <a:rPr sz="1500" b="1">
+              <a:rPr sz="1425" b="1">
                 <a:solidFill>
                   <a:srgbClr val="28685E"/>
                 </a:solidFill>
+                <a:latin typeface="Arial"/>
+                <a:ea typeface="Arial"/>
+                <a:cs typeface="Arial"/>
               </a:rPr>
               <a:t>MADE BY MATT  /  BUILD SCIENCE</a:t>
             </a:r>
@@ -4080,14 +4519,14 @@
       </p:sp>
       <p:pic>
         <p:nvPicPr>
-          <p:cNvPr id="24" name=""/>
+          <p:cNvPr id="29" name=""/>
           <p:cNvPicPr>
             <a:picLocks xmlns:a="http://schemas.openxmlformats.org/drawingml/2006/main" noChangeAspect="1"/>
           </p:cNvPicPr>
           <p:nvPr/>
         </p:nvPicPr>
         <p:blipFill>
-          <a:blip xmlns:r="http://schemas.openxmlformats.org/officeDocument/2006/relationships" xmlns:a="http://schemas.openxmlformats.org/drawingml/2006/main" r:embed="Rc8b8d16ab0fa479c"/>
+          <a:blip xmlns:r="http://schemas.openxmlformats.org/officeDocument/2006/relationships" xmlns:a="http://schemas.openxmlformats.org/drawingml/2006/main" r:embed="R0b21b17851a24f1d"/>
           <a:stretch xmlns:a="http://schemas.openxmlformats.org/drawingml/2006/main"/>
         </p:blipFill>
         <p:spPr>
@@ -4116,8 +4555,8 @@
         </p:nvSpPr>
         <p:spPr>
           <a:xfrm xmlns:a="http://schemas.openxmlformats.org/drawingml/2006/main">
-            <a:off x="609600" y="1352550"/>
-            <a:ext cx="10972800" cy="952500"/>
+            <a:off x="609600" y="1047750"/>
+            <a:ext cx="10972800" cy="895350"/>
           </a:xfrm>
           <a:prstGeom xmlns:a="http://schemas.openxmlformats.org/drawingml/2006/main" prst="rect">
             <a:avLst/>
@@ -4129,21 +4568,30 @@
           </a:ln>
         </p:spPr>
         <p:txBody>
-          <a:bodyPr xmlns:a="http://schemas.openxmlformats.org/drawingml/2006/main" lIns="0" tIns="0" rIns="0" bIns="0" anchor="ctr"/>
+          <a:bodyPr xmlns:a="http://schemas.openxmlformats.org/drawingml/2006/main" wrap="square" lIns="0" tIns="0" rIns="0" bIns="0" anchor="ctr">
+            <a:noAutofit/>
+          </a:bodyPr>
           <a:lstStyle xmlns:a="http://schemas.openxmlformats.org/drawingml/2006/main"/>
           <a:p xmlns:a="http://schemas.openxmlformats.org/drawingml/2006/main">
             <a:pPr>
-              <a:defRPr sz="3750" b="1">
+              <a:buNone/>
+              <a:defRPr sz="3600" b="1">
                 <a:solidFill>
                   <a:srgbClr val="152B3A"/>
                 </a:solidFill>
+                <a:latin typeface="Arial"/>
+                <a:ea typeface="Arial"/>
+                <a:cs typeface="Arial"/>
               </a:defRPr>
             </a:pPr>
             <a:r>
-              <a:rPr sz="3750" b="1">
+              <a:rPr sz="3600" b="1">
                 <a:solidFill>
                   <a:srgbClr val="152B3A"/>
                 </a:solidFill>
+                <a:latin typeface="Arial"/>
+                <a:ea typeface="Arial"/>
+                <a:cs typeface="Arial"/>
               </a:rPr>
               <a:t>Build the second chain</a:t>
             </a:r>
@@ -4210,21 +4658,30 @@
           </a:ln>
         </p:spPr>
         <p:txBody>
-          <a:bodyPr xmlns:a="http://schemas.openxmlformats.org/drawingml/2006/main" lIns="0" tIns="0" rIns="0" bIns="0" anchor="ctr"/>
+          <a:bodyPr xmlns:a="http://schemas.openxmlformats.org/drawingml/2006/main" wrap="square" lIns="0" tIns="0" rIns="0" bIns="0" anchor="ctr">
+            <a:noAutofit/>
+          </a:bodyPr>
           <a:lstStyle xmlns:a="http://schemas.openxmlformats.org/drawingml/2006/main"/>
           <a:p xmlns:a="http://schemas.openxmlformats.org/drawingml/2006/main">
             <a:pPr>
-              <a:defRPr sz="1275" b="0">
+              <a:buNone/>
+              <a:defRPr sz="1200" b="0">
                 <a:solidFill>
                   <a:srgbClr val="50616B"/>
                 </a:solidFill>
+                <a:latin typeface="Arial"/>
+                <a:ea typeface="Arial"/>
+                <a:cs typeface="Arial"/>
               </a:defRPr>
             </a:pPr>
             <a:r>
-              <a:rPr sz="1275" b="0">
+              <a:rPr sz="1200" b="0">
                 <a:solidFill>
                   <a:srgbClr val="50616B"/>
                 </a:solidFill>
+                <a:latin typeface="Arial"/>
+                <a:ea typeface="Arial"/>
+                <a:cs typeface="Arial"/>
               </a:rPr>
               <a:t>AUTUMN 1  ·  WEEK 7  ·  LESSON B</a:t>
             </a:r>
@@ -4260,14 +4717,20 @@
           </a:ln>
         </p:spPr>
         <p:txBody>
-          <a:bodyPr xmlns:a="http://schemas.openxmlformats.org/drawingml/2006/main" lIns="0" tIns="0" rIns="0" bIns="0" anchor="ctr"/>
+          <a:bodyPr xmlns:a="http://schemas.openxmlformats.org/drawingml/2006/main" wrap="square" lIns="0" tIns="0" rIns="0" bIns="0" anchor="ctr">
+            <a:noAutofit/>
+          </a:bodyPr>
           <a:lstStyle xmlns:a="http://schemas.openxmlformats.org/drawingml/2006/main"/>
           <a:p xmlns:a="http://schemas.openxmlformats.org/drawingml/2006/main">
             <a:pPr>
+              <a:buNone/>
               <a:defRPr sz="1350" b="1">
                 <a:solidFill>
                   <a:srgbClr val="28685E"/>
                 </a:solidFill>
+                <a:latin typeface="Arial"/>
+                <a:ea typeface="Arial"/>
+                <a:cs typeface="Arial"/>
               </a:defRPr>
             </a:pPr>
             <a:r>
@@ -4275,6 +4738,9 @@
                 <a:solidFill>
                   <a:srgbClr val="28685E"/>
                 </a:solidFill>
+                <a:latin typeface="Arial"/>
+                <a:ea typeface="Arial"/>
+                <a:cs typeface="Arial"/>
               </a:rPr>
               <a:t>04</a:t>
             </a:r>
@@ -4297,14 +4763,14 @@
         </p:nvSpPr>
         <p:spPr>
           <a:xfrm xmlns:a="http://schemas.openxmlformats.org/drawingml/2006/main">
-            <a:off x="2114550" y="3486150"/>
-            <a:ext cx="428625" cy="247650"/>
+            <a:off x="2114550" y="4000500"/>
+            <a:ext cx="438150" cy="209550"/>
           </a:xfrm>
           <a:prstGeom xmlns:a="http://schemas.openxmlformats.org/drawingml/2006/main" prst="rightArrow">
             <a:avLst/>
           </a:prstGeom>
           <a:solidFill xmlns:a="http://schemas.openxmlformats.org/drawingml/2006/main">
-            <a:srgbClr val="4E7A9B"/>
+            <a:srgbClr val="28685E"/>
           </a:solidFill>
           <a:ln xmlns:a="http://schemas.openxmlformats.org/drawingml/2006/main" w="19050">
             <a:solidFill>
@@ -4330,14 +4796,14 @@
         </p:nvSpPr>
         <p:spPr>
           <a:xfrm xmlns:a="http://schemas.openxmlformats.org/drawingml/2006/main">
-            <a:off x="3905250" y="3486150"/>
-            <a:ext cx="428625" cy="247650"/>
+            <a:off x="3905250" y="4000500"/>
+            <a:ext cx="438150" cy="209550"/>
           </a:xfrm>
           <a:prstGeom xmlns:a="http://schemas.openxmlformats.org/drawingml/2006/main" prst="rightArrow">
             <a:avLst/>
           </a:prstGeom>
           <a:solidFill xmlns:a="http://schemas.openxmlformats.org/drawingml/2006/main">
-            <a:srgbClr val="4E7A9B"/>
+            <a:srgbClr val="28685E"/>
           </a:solidFill>
           <a:ln xmlns:a="http://schemas.openxmlformats.org/drawingml/2006/main" w="19050">
             <a:solidFill>
@@ -4363,8 +4829,8 @@
         </p:nvSpPr>
         <p:spPr>
           <a:xfrm xmlns:a="http://schemas.openxmlformats.org/drawingml/2006/main">
-            <a:off x="762000" y="3238500"/>
-            <a:ext cx="1314450" cy="800100"/>
+            <a:off x="762000" y="3848100"/>
+            <a:ext cx="1314450" cy="504825"/>
           </a:xfrm>
           <a:prstGeom xmlns:a="http://schemas.openxmlformats.org/drawingml/2006/main" prst="rect">
             <a:avLst/>
@@ -4396,8 +4862,8 @@
         </p:nvSpPr>
         <p:spPr>
           <a:xfrm xmlns:a="http://schemas.openxmlformats.org/drawingml/2006/main">
-            <a:off x="2552700" y="3238500"/>
-            <a:ext cx="1314450" cy="800100"/>
+            <a:off x="2552700" y="3848100"/>
+            <a:ext cx="1314450" cy="504825"/>
           </a:xfrm>
           <a:prstGeom xmlns:a="http://schemas.openxmlformats.org/drawingml/2006/main" prst="rect">
             <a:avLst/>
@@ -4429,8 +4895,8 @@
         </p:nvSpPr>
         <p:spPr>
           <a:xfrm xmlns:a="http://schemas.openxmlformats.org/drawingml/2006/main">
-            <a:off x="4343400" y="3238500"/>
-            <a:ext cx="1314450" cy="800100"/>
+            <a:off x="4343400" y="3848100"/>
+            <a:ext cx="1314450" cy="504825"/>
           </a:xfrm>
           <a:prstGeom xmlns:a="http://schemas.openxmlformats.org/drawingml/2006/main" prst="rect">
             <a:avLst/>
@@ -4462,8 +4928,8 @@
         </p:nvSpPr>
         <p:spPr>
           <a:xfrm xmlns:a="http://schemas.openxmlformats.org/drawingml/2006/main">
-            <a:off x="857250" y="3467100"/>
-            <a:ext cx="1123950" cy="381000"/>
+            <a:off x="819150" y="3905250"/>
+            <a:ext cx="1200150" cy="381000"/>
           </a:xfrm>
           <a:prstGeom xmlns:a="http://schemas.openxmlformats.org/drawingml/2006/main" prst="rect">
             <a:avLst/>
@@ -4475,21 +4941,30 @@
           </a:ln>
         </p:spPr>
         <p:txBody>
-          <a:bodyPr xmlns:a="http://schemas.openxmlformats.org/drawingml/2006/main" lIns="0" tIns="0" rIns="0" bIns="0" anchor="ctr"/>
+          <a:bodyPr xmlns:a="http://schemas.openxmlformats.org/drawingml/2006/main" wrap="square" lIns="0" tIns="0" rIns="0" bIns="0" anchor="ctr">
+            <a:noAutofit/>
+          </a:bodyPr>
           <a:lstStyle xmlns:a="http://schemas.openxmlformats.org/drawingml/2006/main"/>
           <a:p xmlns:a="http://schemas.openxmlformats.org/drawingml/2006/main">
             <a:pPr>
-              <a:defRPr sz="1725" b="1">
+              <a:buNone/>
+              <a:defRPr sz="1875" b="1">
                 <a:solidFill>
                   <a:srgbClr val="152B3A"/>
                 </a:solidFill>
+                <a:latin typeface="Arial"/>
+                <a:ea typeface="Arial"/>
+                <a:cs typeface="Arial"/>
               </a:defRPr>
             </a:pPr>
             <a:r>
-              <a:rPr sz="1725" b="1">
+              <a:rPr sz="1875" b="1">
                 <a:solidFill>
                   <a:srgbClr val="152B3A"/>
                 </a:solidFill>
+                <a:latin typeface="Arial"/>
+                <a:ea typeface="Arial"/>
+                <a:cs typeface="Arial"/>
               </a:rPr>
               <a:t>leaves</a:t>
             </a:r>
@@ -4512,8 +4987,8 @@
         </p:nvSpPr>
         <p:spPr>
           <a:xfrm xmlns:a="http://schemas.openxmlformats.org/drawingml/2006/main">
-            <a:off x="2647950" y="3467100"/>
-            <a:ext cx="1123950" cy="381000"/>
+            <a:off x="2609850" y="3905250"/>
+            <a:ext cx="1200150" cy="381000"/>
           </a:xfrm>
           <a:prstGeom xmlns:a="http://schemas.openxmlformats.org/drawingml/2006/main" prst="rect">
             <a:avLst/>
@@ -4525,21 +5000,30 @@
           </a:ln>
         </p:spPr>
         <p:txBody>
-          <a:bodyPr xmlns:a="http://schemas.openxmlformats.org/drawingml/2006/main" lIns="0" tIns="0" rIns="0" bIns="0" anchor="ctr"/>
+          <a:bodyPr xmlns:a="http://schemas.openxmlformats.org/drawingml/2006/main" wrap="square" lIns="0" tIns="0" rIns="0" bIns="0" anchor="ctr">
+            <a:noAutofit/>
+          </a:bodyPr>
           <a:lstStyle xmlns:a="http://schemas.openxmlformats.org/drawingml/2006/main"/>
           <a:p xmlns:a="http://schemas.openxmlformats.org/drawingml/2006/main">
             <a:pPr>
-              <a:defRPr sz="1725" b="1">
+              <a:buNone/>
+              <a:defRPr sz="1650" b="1">
                 <a:solidFill>
                   <a:srgbClr val="152B3A"/>
                 </a:solidFill>
+                <a:latin typeface="Arial"/>
+                <a:ea typeface="Arial"/>
+                <a:cs typeface="Arial"/>
               </a:defRPr>
             </a:pPr>
             <a:r>
-              <a:rPr sz="1725" b="1">
+              <a:rPr sz="1650" b="1">
                 <a:solidFill>
                   <a:srgbClr val="152B3A"/>
                 </a:solidFill>
+                <a:latin typeface="Arial"/>
+                <a:ea typeface="Arial"/>
+                <a:cs typeface="Arial"/>
               </a:rPr>
               <a:t>caterpillar</a:t>
             </a:r>
@@ -4562,8 +5046,8 @@
         </p:nvSpPr>
         <p:spPr>
           <a:xfrm xmlns:a="http://schemas.openxmlformats.org/drawingml/2006/main">
-            <a:off x="4438650" y="3467100"/>
-            <a:ext cx="1123950" cy="381000"/>
+            <a:off x="4400550" y="3905250"/>
+            <a:ext cx="1200150" cy="381000"/>
           </a:xfrm>
           <a:prstGeom xmlns:a="http://schemas.openxmlformats.org/drawingml/2006/main" prst="rect">
             <a:avLst/>
@@ -4575,21 +5059,30 @@
           </a:ln>
         </p:spPr>
         <p:txBody>
-          <a:bodyPr xmlns:a="http://schemas.openxmlformats.org/drawingml/2006/main" lIns="0" tIns="0" rIns="0" bIns="0" anchor="ctr"/>
+          <a:bodyPr xmlns:a="http://schemas.openxmlformats.org/drawingml/2006/main" wrap="square" lIns="0" tIns="0" rIns="0" bIns="0" anchor="ctr">
+            <a:noAutofit/>
+          </a:bodyPr>
           <a:lstStyle xmlns:a="http://schemas.openxmlformats.org/drawingml/2006/main"/>
           <a:p xmlns:a="http://schemas.openxmlformats.org/drawingml/2006/main">
             <a:pPr>
-              <a:defRPr sz="1725" b="1">
+              <a:buNone/>
+              <a:defRPr sz="1875" b="1">
                 <a:solidFill>
                   <a:srgbClr val="152B3A"/>
                 </a:solidFill>
+                <a:latin typeface="Arial"/>
+                <a:ea typeface="Arial"/>
+                <a:cs typeface="Arial"/>
               </a:defRPr>
             </a:pPr>
             <a:r>
-              <a:rPr sz="1725" b="1">
+              <a:rPr sz="1875" b="1">
                 <a:solidFill>
                   <a:srgbClr val="152B3A"/>
                 </a:solidFill>
+                <a:latin typeface="Arial"/>
+                <a:ea typeface="Arial"/>
+                <a:cs typeface="Arial"/>
               </a:rPr>
               <a:t>robin</a:t>
             </a:r>
@@ -4612,8 +5105,8 @@
         </p:nvSpPr>
         <p:spPr>
           <a:xfrm xmlns:a="http://schemas.openxmlformats.org/drawingml/2006/main">
-            <a:off x="781050" y="4267200"/>
-            <a:ext cx="1381125" cy="381000"/>
+            <a:off x="762000" y="4514850"/>
+            <a:ext cx="1428750" cy="428625"/>
           </a:xfrm>
           <a:prstGeom xmlns:a="http://schemas.openxmlformats.org/drawingml/2006/main" prst="rect">
             <a:avLst/>
@@ -4625,21 +5118,30 @@
           </a:ln>
         </p:spPr>
         <p:txBody>
-          <a:bodyPr xmlns:a="http://schemas.openxmlformats.org/drawingml/2006/main" lIns="0" tIns="0" rIns="0" bIns="0" anchor="ctr"/>
+          <a:bodyPr xmlns:a="http://schemas.openxmlformats.org/drawingml/2006/main" wrap="square" lIns="0" tIns="0" rIns="0" bIns="0" anchor="ctr">
+            <a:noAutofit/>
+          </a:bodyPr>
           <a:lstStyle xmlns:a="http://schemas.openxmlformats.org/drawingml/2006/main"/>
           <a:p xmlns:a="http://schemas.openxmlformats.org/drawingml/2006/main">
             <a:pPr>
-              <a:defRPr sz="1650" b="1">
-                <a:solidFill>
-                  <a:srgbClr val="152B3A"/>
-                </a:solidFill>
+              <a:buNone/>
+              <a:defRPr sz="1800" b="1">
+                <a:solidFill>
+                  <a:srgbClr val="28685E"/>
+                </a:solidFill>
+                <a:latin typeface="Arial"/>
+                <a:ea typeface="Arial"/>
+                <a:cs typeface="Arial"/>
               </a:defRPr>
             </a:pPr>
             <a:r>
-              <a:rPr sz="1650" b="1">
-                <a:solidFill>
-                  <a:srgbClr val="152B3A"/>
-                </a:solidFill>
+              <a:rPr sz="1800" b="1">
+                <a:solidFill>
+                  <a:srgbClr val="28685E"/>
+                </a:solidFill>
+                <a:latin typeface="Arial"/>
+                <a:ea typeface="Arial"/>
+                <a:cs typeface="Arial"/>
               </a:rPr>
               <a:t>producer</a:t>
             </a:r>
@@ -4662,8 +5164,8 @@
         </p:nvSpPr>
         <p:spPr>
           <a:xfrm xmlns:a="http://schemas.openxmlformats.org/drawingml/2006/main">
-            <a:off x="2552700" y="4267200"/>
-            <a:ext cx="1428750" cy="381000"/>
+            <a:off x="2552700" y="4514850"/>
+            <a:ext cx="1428750" cy="428625"/>
           </a:xfrm>
           <a:prstGeom xmlns:a="http://schemas.openxmlformats.org/drawingml/2006/main" prst="rect">
             <a:avLst/>
@@ -4675,21 +5177,30 @@
           </a:ln>
         </p:spPr>
         <p:txBody>
-          <a:bodyPr xmlns:a="http://schemas.openxmlformats.org/drawingml/2006/main" lIns="0" tIns="0" rIns="0" bIns="0" anchor="ctr"/>
+          <a:bodyPr xmlns:a="http://schemas.openxmlformats.org/drawingml/2006/main" wrap="square" lIns="0" tIns="0" rIns="0" bIns="0" anchor="ctr">
+            <a:noAutofit/>
+          </a:bodyPr>
           <a:lstStyle xmlns:a="http://schemas.openxmlformats.org/drawingml/2006/main"/>
           <a:p xmlns:a="http://schemas.openxmlformats.org/drawingml/2006/main">
             <a:pPr>
-              <a:defRPr sz="1650" b="1">
-                <a:solidFill>
-                  <a:srgbClr val="152B3A"/>
-                </a:solidFill>
+              <a:buNone/>
+              <a:defRPr sz="1800" b="1">
+                <a:solidFill>
+                  <a:srgbClr val="28685E"/>
+                </a:solidFill>
+                <a:latin typeface="Arial"/>
+                <a:ea typeface="Arial"/>
+                <a:cs typeface="Arial"/>
               </a:defRPr>
             </a:pPr>
             <a:r>
-              <a:rPr sz="1650" b="1">
-                <a:solidFill>
-                  <a:srgbClr val="152B3A"/>
-                </a:solidFill>
+              <a:rPr sz="1800" b="1">
+                <a:solidFill>
+                  <a:srgbClr val="28685E"/>
+                </a:solidFill>
+                <a:latin typeface="Arial"/>
+                <a:ea typeface="Arial"/>
+                <a:cs typeface="Arial"/>
               </a:rPr>
               <a:t>consumer</a:t>
             </a:r>
@@ -4712,8 +5223,8 @@
         </p:nvSpPr>
         <p:spPr>
           <a:xfrm xmlns:a="http://schemas.openxmlformats.org/drawingml/2006/main">
-            <a:off x="4343400" y="4267200"/>
-            <a:ext cx="1428750" cy="381000"/>
+            <a:off x="4343400" y="4514850"/>
+            <a:ext cx="1428750" cy="428625"/>
           </a:xfrm>
           <a:prstGeom xmlns:a="http://schemas.openxmlformats.org/drawingml/2006/main" prst="rect">
             <a:avLst/>
@@ -4725,21 +5236,30 @@
           </a:ln>
         </p:spPr>
         <p:txBody>
-          <a:bodyPr xmlns:a="http://schemas.openxmlformats.org/drawingml/2006/main" lIns="0" tIns="0" rIns="0" bIns="0" anchor="ctr"/>
+          <a:bodyPr xmlns:a="http://schemas.openxmlformats.org/drawingml/2006/main" wrap="square" lIns="0" tIns="0" rIns="0" bIns="0" anchor="ctr">
+            <a:noAutofit/>
+          </a:bodyPr>
           <a:lstStyle xmlns:a="http://schemas.openxmlformats.org/drawingml/2006/main"/>
           <a:p xmlns:a="http://schemas.openxmlformats.org/drawingml/2006/main">
             <a:pPr>
-              <a:defRPr sz="1650" b="1">
-                <a:solidFill>
-                  <a:srgbClr val="152B3A"/>
-                </a:solidFill>
+              <a:buNone/>
+              <a:defRPr sz="1800" b="1">
+                <a:solidFill>
+                  <a:srgbClr val="28685E"/>
+                </a:solidFill>
+                <a:latin typeface="Arial"/>
+                <a:ea typeface="Arial"/>
+                <a:cs typeface="Arial"/>
               </a:defRPr>
             </a:pPr>
             <a:r>
-              <a:rPr sz="1650" b="1">
-                <a:solidFill>
-                  <a:srgbClr val="152B3A"/>
-                </a:solidFill>
+              <a:rPr sz="1800" b="1">
+                <a:solidFill>
+                  <a:srgbClr val="28685E"/>
+                </a:solidFill>
+                <a:latin typeface="Arial"/>
+                <a:ea typeface="Arial"/>
+                <a:cs typeface="Arial"/>
               </a:rPr>
               <a:t>consumer</a:t>
             </a:r>
@@ -4762,8 +5282,8 @@
         </p:nvSpPr>
         <p:spPr>
           <a:xfrm xmlns:a="http://schemas.openxmlformats.org/drawingml/2006/main">
-            <a:off x="847725" y="4857750"/>
-            <a:ext cx="4810125" cy="619125"/>
+            <a:off x="781050" y="5143500"/>
+            <a:ext cx="5191125" cy="590550"/>
           </a:xfrm>
           <a:prstGeom xmlns:a="http://schemas.openxmlformats.org/drawingml/2006/main" prst="rect">
             <a:avLst/>
@@ -4775,14 +5295,20 @@
           </a:ln>
         </p:spPr>
         <p:txBody>
-          <a:bodyPr xmlns:a="http://schemas.openxmlformats.org/drawingml/2006/main" lIns="0" tIns="0" rIns="0" bIns="0" anchor="ctr"/>
+          <a:bodyPr xmlns:a="http://schemas.openxmlformats.org/drawingml/2006/main" wrap="square" lIns="0" tIns="0" rIns="0" bIns="0" anchor="ctr">
+            <a:noAutofit/>
+          </a:bodyPr>
           <a:lstStyle xmlns:a="http://schemas.openxmlformats.org/drawingml/2006/main"/>
           <a:p xmlns:a="http://schemas.openxmlformats.org/drawingml/2006/main">
             <a:pPr>
+              <a:buNone/>
               <a:defRPr sz="1800" b="1">
                 <a:solidFill>
                   <a:srgbClr val="152B3A"/>
                 </a:solidFill>
+                <a:latin typeface="Arial"/>
+                <a:ea typeface="Arial"/>
+                <a:cs typeface="Arial"/>
               </a:defRPr>
             </a:pPr>
             <a:r>
@@ -4790,6 +5316,9 @@
                 <a:solidFill>
                   <a:srgbClr val="152B3A"/>
                 </a:solidFill>
+                <a:latin typeface="Arial"/>
+                <a:ea typeface="Arial"/>
+                <a:cs typeface="Arial"/>
               </a:rPr>
               <a:t>food / energy passes to the eater</a:t>
             </a:r>
@@ -4812,8 +5341,8 @@
         </p:nvSpPr>
         <p:spPr>
           <a:xfrm xmlns:a="http://schemas.openxmlformats.org/drawingml/2006/main">
-            <a:off x="6667500" y="2714625"/>
-            <a:ext cx="4857750" cy="1762125"/>
+            <a:off x="6667500" y="2533650"/>
+            <a:ext cx="4762500" cy="1809750"/>
           </a:xfrm>
           <a:prstGeom xmlns:a="http://schemas.openxmlformats.org/drawingml/2006/main" prst="rect">
             <a:avLst/>
@@ -4825,21 +5354,30 @@
           </a:ln>
         </p:spPr>
         <p:txBody>
-          <a:bodyPr xmlns:a="http://schemas.openxmlformats.org/drawingml/2006/main" lIns="0" tIns="0" rIns="0" bIns="0" anchor="ctr"/>
+          <a:bodyPr xmlns:a="http://schemas.openxmlformats.org/drawingml/2006/main" wrap="square" lIns="0" tIns="0" rIns="0" bIns="0" anchor="ctr">
+            <a:noAutofit/>
+          </a:bodyPr>
           <a:lstStyle xmlns:a="http://schemas.openxmlformats.org/drawingml/2006/main"/>
           <a:p xmlns:a="http://schemas.openxmlformats.org/drawingml/2006/main">
             <a:pPr>
-              <a:defRPr sz="2550" b="1">
+              <a:buNone/>
+              <a:defRPr sz="2475" b="1">
                 <a:solidFill>
                   <a:srgbClr val="152B3A"/>
                 </a:solidFill>
+                <a:latin typeface="Arial"/>
+                <a:ea typeface="Arial"/>
+                <a:cs typeface="Arial"/>
               </a:defRPr>
             </a:pPr>
             <a:r>
-              <a:rPr sz="2550" b="1">
+              <a:rPr sz="2475" b="1">
                 <a:solidFill>
                   <a:srgbClr val="152B3A"/>
                 </a:solidFill>
+                <a:latin typeface="Arial"/>
+                <a:ea typeface="Arial"/>
+                <a:cs typeface="Arial"/>
               </a:rPr>
               <a:t>A caterpillar can eat leaves. A robin can eat a caterpillar.</a:t>
             </a:r>
@@ -4862,8 +5400,8 @@
         </p:nvSpPr>
         <p:spPr>
           <a:xfrm xmlns:a="http://schemas.openxmlformats.org/drawingml/2006/main">
-            <a:off x="6667500" y="4714875"/>
-            <a:ext cx="4857750" cy="1000125"/>
+            <a:off x="6667500" y="4629150"/>
+            <a:ext cx="4762500" cy="1162050"/>
           </a:xfrm>
           <a:prstGeom xmlns:a="http://schemas.openxmlformats.org/drawingml/2006/main" prst="rect">
             <a:avLst/>
@@ -4875,14 +5413,20 @@
           </a:ln>
         </p:spPr>
         <p:txBody>
-          <a:bodyPr xmlns:a="http://schemas.openxmlformats.org/drawingml/2006/main" lIns="0" tIns="0" rIns="0" bIns="0" anchor="ctr"/>
+          <a:bodyPr xmlns:a="http://schemas.openxmlformats.org/drawingml/2006/main" wrap="square" lIns="0" tIns="0" rIns="0" bIns="0" anchor="ctr">
+            <a:noAutofit/>
+          </a:bodyPr>
           <a:lstStyle xmlns:a="http://schemas.openxmlformats.org/drawingml/2006/main"/>
           <a:p xmlns:a="http://schemas.openxmlformats.org/drawingml/2006/main">
             <a:pPr>
+              <a:buNone/>
               <a:defRPr sz="2175" b="0">
                 <a:solidFill>
                   <a:srgbClr val="28685E"/>
                 </a:solidFill>
+                <a:latin typeface="Arial"/>
+                <a:ea typeface="Arial"/>
+                <a:cs typeface="Arial"/>
               </a:defRPr>
             </a:pPr>
             <a:r>
@@ -4890,12 +5434,81 @@
                 <a:solidFill>
                   <a:srgbClr val="28685E"/>
                 </a:solidFill>
+                <a:latin typeface="Arial"/>
+                <a:ea typeface="Arial"/>
+                <a:cs typeface="Arial"/>
               </a:rPr>
               <a:t>The green plant is the producer in this model.</a:t>
             </a:r>
           </a:p>
         </p:txBody>
       </p:sp>
+      <p:pic>
+        <p:nvPicPr>
+          <p:cNvPr id="48" name=""/>
+          <p:cNvPicPr>
+            <a:picLocks xmlns:a="http://schemas.openxmlformats.org/drawingml/2006/main" noChangeAspect="1"/>
+          </p:cNvPicPr>
+          <p:nvPr/>
+        </p:nvPicPr>
+        <p:blipFill>
+          <a:blip xmlns:r="http://schemas.openxmlformats.org/officeDocument/2006/relationships" xmlns:a="http://schemas.openxmlformats.org/drawingml/2006/main" r:embed="Rb4c2e494a1194ea9"/>
+          <a:stretch xmlns:a="http://schemas.openxmlformats.org/drawingml/2006/main"/>
+        </p:blipFill>
+        <p:spPr>
+          <a:xfrm xmlns:a="http://schemas.openxmlformats.org/drawingml/2006/main">
+            <a:off x="762000" y="2277625"/>
+            <a:ext cx="1314450" cy="1359776"/>
+          </a:xfrm>
+          <a:prstGeom xmlns:a="http://schemas.openxmlformats.org/drawingml/2006/main" prst="rect">
+            <a:avLst/>
+          </a:prstGeom>
+        </p:spPr>
+      </p:pic>
+      <p:pic>
+        <p:nvPicPr>
+          <p:cNvPr id="49" name=""/>
+          <p:cNvPicPr>
+            <a:picLocks xmlns:a="http://schemas.openxmlformats.org/drawingml/2006/main" noChangeAspect="1"/>
+          </p:cNvPicPr>
+          <p:nvPr/>
+        </p:nvPicPr>
+        <p:blipFill>
+          <a:blip xmlns:r="http://schemas.openxmlformats.org/officeDocument/2006/relationships" xmlns:a="http://schemas.openxmlformats.org/drawingml/2006/main" r:embed="R01daa2c3ec7049f0"/>
+          <a:stretch xmlns:a="http://schemas.openxmlformats.org/drawingml/2006/main"/>
+        </p:blipFill>
+        <p:spPr>
+          <a:xfrm xmlns:a="http://schemas.openxmlformats.org/drawingml/2006/main">
+            <a:off x="2552700" y="2542365"/>
+            <a:ext cx="1314450" cy="830294"/>
+          </a:xfrm>
+          <a:prstGeom xmlns:a="http://schemas.openxmlformats.org/drawingml/2006/main" prst="rect">
+            <a:avLst/>
+          </a:prstGeom>
+        </p:spPr>
+      </p:pic>
+      <p:pic>
+        <p:nvPicPr>
+          <p:cNvPr id="50" name=""/>
+          <p:cNvPicPr>
+            <a:picLocks xmlns:a="http://schemas.openxmlformats.org/drawingml/2006/main" noChangeAspect="1"/>
+          </p:cNvPicPr>
+          <p:nvPr/>
+        </p:nvPicPr>
+        <p:blipFill>
+          <a:blip xmlns:r="http://schemas.openxmlformats.org/officeDocument/2006/relationships" xmlns:a="http://schemas.openxmlformats.org/drawingml/2006/main" r:embed="R7a3ccac417a84f5a"/>
+          <a:stretch xmlns:a="http://schemas.openxmlformats.org/drawingml/2006/main"/>
+        </p:blipFill>
+        <p:spPr>
+          <a:xfrm xmlns:a="http://schemas.openxmlformats.org/drawingml/2006/main">
+            <a:off x="4343400" y="2533055"/>
+            <a:ext cx="1314450" cy="848916"/>
+          </a:xfrm>
+          <a:prstGeom xmlns:a="http://schemas.openxmlformats.org/drawingml/2006/main" prst="rect">
+            <a:avLst/>
+          </a:prstGeom>
+        </p:spPr>
+      </p:pic>
     </p:spTree>
     <p:extLst>
       <p:ext uri="{BB962C8B-B14F-4D97-AF65-F5344CB8AC3E}">
@@ -4912,7 +5525,7 @@
     <p:bg>
       <p:bgPr>
         <a:solidFill xmlns:a="http://schemas.openxmlformats.org/drawingml/2006/main">
-          <a:srgbClr val="F5F1E8"/>
+          <a:srgbClr val="FBF9F3"/>
         </a:solidFill>
       </p:bgPr>
     </p:bg>
@@ -4941,8 +5554,8 @@
         </p:nvSpPr>
         <p:spPr>
           <a:xfrm xmlns:a="http://schemas.openxmlformats.org/drawingml/2006/main">
-            <a:off x="609600" y="552450"/>
-            <a:ext cx="781050" cy="57150"/>
+            <a:off x="609600" y="742950"/>
+            <a:ext cx="9906000" cy="38100"/>
           </a:xfrm>
           <a:prstGeom xmlns:a="http://schemas.openxmlformats.org/drawingml/2006/main" prst="rect">
             <a:avLst/>
@@ -4972,8 +5585,8 @@
         </p:nvSpPr>
         <p:spPr>
           <a:xfrm xmlns:a="http://schemas.openxmlformats.org/drawingml/2006/main">
-            <a:off x="609600" y="762000"/>
-            <a:ext cx="9334500" cy="285750"/>
+            <a:off x="609600" y="342900"/>
+            <a:ext cx="9334500" cy="266700"/>
           </a:xfrm>
           <a:prstGeom xmlns:a="http://schemas.openxmlformats.org/drawingml/2006/main" prst="rect">
             <a:avLst/>
@@ -4985,21 +5598,30 @@
           </a:ln>
         </p:spPr>
         <p:txBody>
-          <a:bodyPr xmlns:a="http://schemas.openxmlformats.org/drawingml/2006/main" lIns="0" tIns="0" rIns="0" bIns="0" anchor="ctr"/>
+          <a:bodyPr xmlns:a="http://schemas.openxmlformats.org/drawingml/2006/main" wrap="square" lIns="0" tIns="0" rIns="0" bIns="0" anchor="ctr">
+            <a:noAutofit/>
+          </a:bodyPr>
           <a:lstStyle xmlns:a="http://schemas.openxmlformats.org/drawingml/2006/main"/>
           <a:p xmlns:a="http://schemas.openxmlformats.org/drawingml/2006/main">
             <a:pPr>
-              <a:defRPr sz="1500" b="1">
+              <a:buNone/>
+              <a:defRPr sz="1425" b="1">
                 <a:solidFill>
                   <a:srgbClr val="28685E"/>
                 </a:solidFill>
+                <a:latin typeface="Arial"/>
+                <a:ea typeface="Arial"/>
+                <a:cs typeface="Arial"/>
               </a:defRPr>
             </a:pPr>
             <a:r>
-              <a:rPr sz="1500" b="1">
+              <a:rPr sz="1425" b="1">
                 <a:solidFill>
                   <a:srgbClr val="28685E"/>
                 </a:solidFill>
+                <a:latin typeface="Arial"/>
+                <a:ea typeface="Arial"/>
+                <a:cs typeface="Arial"/>
               </a:rPr>
               <a:t>MADE BY MATT  /  BUILD SCIENCE</a:t>
             </a:r>
@@ -5008,14 +5630,14 @@
       </p:sp>
       <p:pic>
         <p:nvPicPr>
-          <p:cNvPr id="14" name=""/>
+          <p:cNvPr id="16" name=""/>
           <p:cNvPicPr>
             <a:picLocks xmlns:a="http://schemas.openxmlformats.org/drawingml/2006/main" noChangeAspect="1"/>
           </p:cNvPicPr>
           <p:nvPr/>
         </p:nvPicPr>
         <p:blipFill>
-          <a:blip xmlns:r="http://schemas.openxmlformats.org/officeDocument/2006/relationships" xmlns:a="http://schemas.openxmlformats.org/drawingml/2006/main" r:embed="R340c4c4cf47a4908"/>
+          <a:blip xmlns:r="http://schemas.openxmlformats.org/officeDocument/2006/relationships" xmlns:a="http://schemas.openxmlformats.org/drawingml/2006/main" r:embed="Rd1c7edb39f624726"/>
           <a:stretch xmlns:a="http://schemas.openxmlformats.org/drawingml/2006/main"/>
         </p:blipFill>
         <p:spPr>
@@ -5044,8 +5666,8 @@
         </p:nvSpPr>
         <p:spPr>
           <a:xfrm xmlns:a="http://schemas.openxmlformats.org/drawingml/2006/main">
-            <a:off x="609600" y="1352550"/>
-            <a:ext cx="10972800" cy="952500"/>
+            <a:off x="609600" y="1047750"/>
+            <a:ext cx="10972800" cy="895350"/>
           </a:xfrm>
           <a:prstGeom xmlns:a="http://schemas.openxmlformats.org/drawingml/2006/main" prst="rect">
             <a:avLst/>
@@ -5057,21 +5679,30 @@
           </a:ln>
         </p:spPr>
         <p:txBody>
-          <a:bodyPr xmlns:a="http://schemas.openxmlformats.org/drawingml/2006/main" lIns="0" tIns="0" rIns="0" bIns="0" anchor="ctr"/>
+          <a:bodyPr xmlns:a="http://schemas.openxmlformats.org/drawingml/2006/main" wrap="square" lIns="0" tIns="0" rIns="0" bIns="0" anchor="ctr">
+            <a:noAutofit/>
+          </a:bodyPr>
           <a:lstStyle xmlns:a="http://schemas.openxmlformats.org/drawingml/2006/main"/>
           <a:p xmlns:a="http://schemas.openxmlformats.org/drawingml/2006/main">
             <a:pPr>
-              <a:defRPr sz="3750" b="1">
+              <a:buNone/>
+              <a:defRPr sz="3600" b="1">
                 <a:solidFill>
                   <a:srgbClr val="152B3A"/>
                 </a:solidFill>
+                <a:latin typeface="Arial"/>
+                <a:ea typeface="Arial"/>
+                <a:cs typeface="Arial"/>
               </a:defRPr>
             </a:pPr>
             <a:r>
-              <a:rPr sz="3750" b="1">
+              <a:rPr sz="3600" b="1">
                 <a:solidFill>
                   <a:srgbClr val="152B3A"/>
                 </a:solidFill>
+                <a:latin typeface="Arial"/>
+                <a:ea typeface="Arial"/>
+                <a:cs typeface="Arial"/>
               </a:rPr>
               <a:t>Make an error, then repair it</a:t>
             </a:r>
@@ -5138,21 +5769,30 @@
           </a:ln>
         </p:spPr>
         <p:txBody>
-          <a:bodyPr xmlns:a="http://schemas.openxmlformats.org/drawingml/2006/main" lIns="0" tIns="0" rIns="0" bIns="0" anchor="ctr"/>
+          <a:bodyPr xmlns:a="http://schemas.openxmlformats.org/drawingml/2006/main" wrap="square" lIns="0" tIns="0" rIns="0" bIns="0" anchor="ctr">
+            <a:noAutofit/>
+          </a:bodyPr>
           <a:lstStyle xmlns:a="http://schemas.openxmlformats.org/drawingml/2006/main"/>
           <a:p xmlns:a="http://schemas.openxmlformats.org/drawingml/2006/main">
             <a:pPr>
-              <a:defRPr sz="1275" b="0">
+              <a:buNone/>
+              <a:defRPr sz="1200" b="0">
                 <a:solidFill>
                   <a:srgbClr val="50616B"/>
                 </a:solidFill>
+                <a:latin typeface="Arial"/>
+                <a:ea typeface="Arial"/>
+                <a:cs typeface="Arial"/>
               </a:defRPr>
             </a:pPr>
             <a:r>
-              <a:rPr sz="1275" b="0">
+              <a:rPr sz="1200" b="0">
                 <a:solidFill>
                   <a:srgbClr val="50616B"/>
                 </a:solidFill>
+                <a:latin typeface="Arial"/>
+                <a:ea typeface="Arial"/>
+                <a:cs typeface="Arial"/>
               </a:rPr>
               <a:t>AUTUMN 1  ·  WEEK 7  ·  LESSON B</a:t>
             </a:r>
@@ -5188,14 +5828,20 @@
           </a:ln>
         </p:spPr>
         <p:txBody>
-          <a:bodyPr xmlns:a="http://schemas.openxmlformats.org/drawingml/2006/main" lIns="0" tIns="0" rIns="0" bIns="0" anchor="ctr"/>
+          <a:bodyPr xmlns:a="http://schemas.openxmlformats.org/drawingml/2006/main" wrap="square" lIns="0" tIns="0" rIns="0" bIns="0" anchor="ctr">
+            <a:noAutofit/>
+          </a:bodyPr>
           <a:lstStyle xmlns:a="http://schemas.openxmlformats.org/drawingml/2006/main"/>
           <a:p xmlns:a="http://schemas.openxmlformats.org/drawingml/2006/main">
             <a:pPr>
+              <a:buNone/>
               <a:defRPr sz="1350" b="1">
                 <a:solidFill>
                   <a:srgbClr val="28685E"/>
                 </a:solidFill>
+                <a:latin typeface="Arial"/>
+                <a:ea typeface="Arial"/>
+                <a:cs typeface="Arial"/>
               </a:defRPr>
             </a:pPr>
             <a:r>
@@ -5203,6 +5849,9 @@
                 <a:solidFill>
                   <a:srgbClr val="28685E"/>
                 </a:solidFill>
+                <a:latin typeface="Arial"/>
+                <a:ea typeface="Arial"/>
+                <a:cs typeface="Arial"/>
               </a:rPr>
               <a:t>05</a:t>
             </a:r>
@@ -5225,8 +5874,8 @@
         </p:nvSpPr>
         <p:spPr>
           <a:xfrm xmlns:a="http://schemas.openxmlformats.org/drawingml/2006/main">
-            <a:off x="609600" y="2619375"/>
-            <a:ext cx="10972800" cy="714375"/>
+            <a:off x="609600" y="2305050"/>
+            <a:ext cx="10972800" cy="704850"/>
           </a:xfrm>
           <a:prstGeom xmlns:a="http://schemas.openxmlformats.org/drawingml/2006/main" prst="rect">
             <a:avLst/>
@@ -5238,14 +5887,20 @@
           </a:ln>
         </p:spPr>
         <p:txBody>
-          <a:bodyPr xmlns:a="http://schemas.openxmlformats.org/drawingml/2006/main" lIns="0" tIns="0" rIns="0" bIns="0" anchor="ctr"/>
+          <a:bodyPr xmlns:a="http://schemas.openxmlformats.org/drawingml/2006/main" wrap="square" lIns="0" tIns="0" rIns="0" bIns="0" anchor="ctr">
+            <a:noAutofit/>
+          </a:bodyPr>
           <a:lstStyle xmlns:a="http://schemas.openxmlformats.org/drawingml/2006/main"/>
           <a:p xmlns:a="http://schemas.openxmlformats.org/drawingml/2006/main">
             <a:pPr>
+              <a:buNone/>
               <a:defRPr sz="2550" b="0">
                 <a:solidFill>
                   <a:srgbClr val="152B3A"/>
                 </a:solidFill>
+                <a:latin typeface="Arial"/>
+                <a:ea typeface="Arial"/>
+                <a:cs typeface="Arial"/>
               </a:defRPr>
             </a:pPr>
             <a:r>
@@ -5253,6 +5908,9 @@
                 <a:solidFill>
                   <a:srgbClr val="152B3A"/>
                 </a:solidFill>
+                <a:latin typeface="Arial"/>
+                <a:ea typeface="Arial"/>
+                <a:cs typeface="Arial"/>
               </a:rPr>
               <a:t>Reverse one arrow deliberately.</a:t>
             </a:r>
@@ -5275,8 +5933,8 @@
         </p:nvSpPr>
         <p:spPr>
           <a:xfrm xmlns:a="http://schemas.openxmlformats.org/drawingml/2006/main">
-            <a:off x="609600" y="3409950"/>
-            <a:ext cx="10972800" cy="714375"/>
+            <a:off x="609600" y="3143250"/>
+            <a:ext cx="10972800" cy="704850"/>
           </a:xfrm>
           <a:prstGeom xmlns:a="http://schemas.openxmlformats.org/drawingml/2006/main" prst="rect">
             <a:avLst/>
@@ -5288,14 +5946,20 @@
           </a:ln>
         </p:spPr>
         <p:txBody>
-          <a:bodyPr xmlns:a="http://schemas.openxmlformats.org/drawingml/2006/main" lIns="0" tIns="0" rIns="0" bIns="0" anchor="ctr"/>
+          <a:bodyPr xmlns:a="http://schemas.openxmlformats.org/drawingml/2006/main" wrap="square" lIns="0" tIns="0" rIns="0" bIns="0" anchor="ctr">
+            <a:noAutofit/>
+          </a:bodyPr>
           <a:lstStyle xmlns:a="http://schemas.openxmlformats.org/drawingml/2006/main"/>
           <a:p xmlns:a="http://schemas.openxmlformats.org/drawingml/2006/main">
             <a:pPr>
+              <a:buNone/>
               <a:defRPr sz="2550" b="0">
                 <a:solidFill>
                   <a:srgbClr val="152B3A"/>
                 </a:solidFill>
+                <a:latin typeface="Arial"/>
+                <a:ea typeface="Arial"/>
+                <a:cs typeface="Arial"/>
               </a:defRPr>
             </a:pPr>
             <a:r>
@@ -5303,6 +5967,9 @@
                 <a:solidFill>
                   <a:srgbClr val="152B3A"/>
                 </a:solidFill>
+                <a:latin typeface="Arial"/>
+                <a:ea typeface="Arial"/>
+                <a:cs typeface="Arial"/>
               </a:rPr>
               <a:t>Say what that wrong arrow would mean.</a:t>
             </a:r>
@@ -5325,8 +5992,8 @@
         </p:nvSpPr>
         <p:spPr>
           <a:xfrm xmlns:a="http://schemas.openxmlformats.org/drawingml/2006/main">
-            <a:off x="609600" y="4200525"/>
-            <a:ext cx="10972800" cy="714375"/>
+            <a:off x="609600" y="3981450"/>
+            <a:ext cx="10972800" cy="704850"/>
           </a:xfrm>
           <a:prstGeom xmlns:a="http://schemas.openxmlformats.org/drawingml/2006/main" prst="rect">
             <a:avLst/>
@@ -5338,14 +6005,20 @@
           </a:ln>
         </p:spPr>
         <p:txBody>
-          <a:bodyPr xmlns:a="http://schemas.openxmlformats.org/drawingml/2006/main" lIns="0" tIns="0" rIns="0" bIns="0" anchor="ctr"/>
+          <a:bodyPr xmlns:a="http://schemas.openxmlformats.org/drawingml/2006/main" wrap="square" lIns="0" tIns="0" rIns="0" bIns="0" anchor="ctr">
+            <a:noAutofit/>
+          </a:bodyPr>
           <a:lstStyle xmlns:a="http://schemas.openxmlformats.org/drawingml/2006/main"/>
           <a:p xmlns:a="http://schemas.openxmlformats.org/drawingml/2006/main">
             <a:pPr>
+              <a:buNone/>
               <a:defRPr sz="2550" b="0">
                 <a:solidFill>
                   <a:srgbClr val="152B3A"/>
                 </a:solidFill>
+                <a:latin typeface="Arial"/>
+                <a:ea typeface="Arial"/>
+                <a:cs typeface="Arial"/>
               </a:defRPr>
             </a:pPr>
             <a:r>
@@ -5353,6 +6026,9 @@
                 <a:solidFill>
                   <a:srgbClr val="152B3A"/>
                 </a:solidFill>
+                <a:latin typeface="Arial"/>
+                <a:ea typeface="Arial"/>
+                <a:cs typeface="Arial"/>
               </a:rPr>
               <a:t>Read the feeding clue again.</a:t>
             </a:r>
@@ -5375,8 +6051,8 @@
         </p:nvSpPr>
         <p:spPr>
           <a:xfrm xmlns:a="http://schemas.openxmlformats.org/drawingml/2006/main">
-            <a:off x="609600" y="4991100"/>
-            <a:ext cx="10972800" cy="714375"/>
+            <a:off x="609600" y="4819650"/>
+            <a:ext cx="10972800" cy="704850"/>
           </a:xfrm>
           <a:prstGeom xmlns:a="http://schemas.openxmlformats.org/drawingml/2006/main" prst="rect">
             <a:avLst/>
@@ -5388,21 +6064,30 @@
           </a:ln>
         </p:spPr>
         <p:txBody>
-          <a:bodyPr xmlns:a="http://schemas.openxmlformats.org/drawingml/2006/main" lIns="0" tIns="0" rIns="0" bIns="0" anchor="ctr"/>
+          <a:bodyPr xmlns:a="http://schemas.openxmlformats.org/drawingml/2006/main" wrap="square" lIns="0" tIns="0" rIns="0" bIns="0" anchor="ctr">
+            <a:noAutofit/>
+          </a:bodyPr>
           <a:lstStyle xmlns:a="http://schemas.openxmlformats.org/drawingml/2006/main"/>
           <a:p xmlns:a="http://schemas.openxmlformats.org/drawingml/2006/main">
             <a:pPr>
-              <a:defRPr sz="2550" b="0">
-                <a:solidFill>
-                  <a:srgbClr val="152B3A"/>
-                </a:solidFill>
+              <a:buNone/>
+              <a:defRPr sz="2550" b="1">
+                <a:solidFill>
+                  <a:srgbClr val="28685E"/>
+                </a:solidFill>
+                <a:latin typeface="Arial"/>
+                <a:ea typeface="Arial"/>
+                <a:cs typeface="Arial"/>
               </a:defRPr>
             </a:pPr>
             <a:r>
-              <a:rPr sz="2550" b="0">
-                <a:solidFill>
-                  <a:srgbClr val="152B3A"/>
-                </a:solidFill>
+              <a:rPr sz="2550" b="1">
+                <a:solidFill>
+                  <a:srgbClr val="28685E"/>
+                </a:solidFill>
+                <a:latin typeface="Arial"/>
+                <a:ea typeface="Arial"/>
+                <a:cs typeface="Arial"/>
               </a:rPr>
               <a:t>Turn the arrow back and explain why.</a:t>
             </a:r>
@@ -5425,7 +6110,7 @@
     <p:bg>
       <p:bgPr>
         <a:solidFill xmlns:a="http://schemas.openxmlformats.org/drawingml/2006/main">
-          <a:srgbClr val="F5F1E8"/>
+          <a:srgbClr val="FBF9F3"/>
         </a:solidFill>
       </p:bgPr>
     </p:bg>
@@ -5454,8 +6139,8 @@
         </p:nvSpPr>
         <p:spPr>
           <a:xfrm xmlns:a="http://schemas.openxmlformats.org/drawingml/2006/main">
-            <a:off x="609600" y="552450"/>
-            <a:ext cx="781050" cy="57150"/>
+            <a:off x="609600" y="742950"/>
+            <a:ext cx="9906000" cy="38100"/>
           </a:xfrm>
           <a:prstGeom xmlns:a="http://schemas.openxmlformats.org/drawingml/2006/main" prst="rect">
             <a:avLst/>
@@ -5485,8 +6170,8 @@
         </p:nvSpPr>
         <p:spPr>
           <a:xfrm xmlns:a="http://schemas.openxmlformats.org/drawingml/2006/main">
-            <a:off x="609600" y="762000"/>
-            <a:ext cx="9334500" cy="285750"/>
+            <a:off x="609600" y="342900"/>
+            <a:ext cx="9334500" cy="266700"/>
           </a:xfrm>
           <a:prstGeom xmlns:a="http://schemas.openxmlformats.org/drawingml/2006/main" prst="rect">
             <a:avLst/>
@@ -5498,21 +6183,30 @@
           </a:ln>
         </p:spPr>
         <p:txBody>
-          <a:bodyPr xmlns:a="http://schemas.openxmlformats.org/drawingml/2006/main" lIns="0" tIns="0" rIns="0" bIns="0" anchor="ctr"/>
+          <a:bodyPr xmlns:a="http://schemas.openxmlformats.org/drawingml/2006/main" wrap="square" lIns="0" tIns="0" rIns="0" bIns="0" anchor="ctr">
+            <a:noAutofit/>
+          </a:bodyPr>
           <a:lstStyle xmlns:a="http://schemas.openxmlformats.org/drawingml/2006/main"/>
           <a:p xmlns:a="http://schemas.openxmlformats.org/drawingml/2006/main">
             <a:pPr>
-              <a:defRPr sz="1500" b="1">
+              <a:buNone/>
+              <a:defRPr sz="1425" b="1">
                 <a:solidFill>
                   <a:srgbClr val="28685E"/>
                 </a:solidFill>
+                <a:latin typeface="Arial"/>
+                <a:ea typeface="Arial"/>
+                <a:cs typeface="Arial"/>
               </a:defRPr>
             </a:pPr>
             <a:r>
-              <a:rPr sz="1500" b="1">
+              <a:rPr sz="1425" b="1">
                 <a:solidFill>
                   <a:srgbClr val="28685E"/>
                 </a:solidFill>
+                <a:latin typeface="Arial"/>
+                <a:ea typeface="Arial"/>
+                <a:cs typeface="Arial"/>
               </a:rPr>
               <a:t>MADE BY MATT  /  BUILD SCIENCE</a:t>
             </a:r>
@@ -5521,14 +6215,14 @@
       </p:sp>
       <p:pic>
         <p:nvPicPr>
-          <p:cNvPr id="14" name=""/>
+          <p:cNvPr id="17" name=""/>
           <p:cNvPicPr>
             <a:picLocks xmlns:a="http://schemas.openxmlformats.org/drawingml/2006/main" noChangeAspect="1"/>
           </p:cNvPicPr>
           <p:nvPr/>
         </p:nvPicPr>
         <p:blipFill>
-          <a:blip xmlns:r="http://schemas.openxmlformats.org/officeDocument/2006/relationships" xmlns:a="http://schemas.openxmlformats.org/drawingml/2006/main" r:embed="R8b74524f1d144e24"/>
+          <a:blip xmlns:r="http://schemas.openxmlformats.org/officeDocument/2006/relationships" xmlns:a="http://schemas.openxmlformats.org/drawingml/2006/main" r:embed="R59cc9259de714d61"/>
           <a:stretch xmlns:a="http://schemas.openxmlformats.org/drawingml/2006/main"/>
         </p:blipFill>
         <p:spPr>
@@ -5557,8 +6251,8 @@
         </p:nvSpPr>
         <p:spPr>
           <a:xfrm xmlns:a="http://schemas.openxmlformats.org/drawingml/2006/main">
-            <a:off x="609600" y="1352550"/>
-            <a:ext cx="10972800" cy="952500"/>
+            <a:off x="609600" y="1047750"/>
+            <a:ext cx="10972800" cy="895350"/>
           </a:xfrm>
           <a:prstGeom xmlns:a="http://schemas.openxmlformats.org/drawingml/2006/main" prst="rect">
             <a:avLst/>
@@ -5570,21 +6264,30 @@
           </a:ln>
         </p:spPr>
         <p:txBody>
-          <a:bodyPr xmlns:a="http://schemas.openxmlformats.org/drawingml/2006/main" lIns="0" tIns="0" rIns="0" bIns="0" anchor="ctr"/>
+          <a:bodyPr xmlns:a="http://schemas.openxmlformats.org/drawingml/2006/main" wrap="square" lIns="0" tIns="0" rIns="0" bIns="0" anchor="ctr">
+            <a:noAutofit/>
+          </a:bodyPr>
           <a:lstStyle xmlns:a="http://schemas.openxmlformats.org/drawingml/2006/main"/>
           <a:p xmlns:a="http://schemas.openxmlformats.org/drawingml/2006/main">
             <a:pPr>
-              <a:defRPr sz="3750" b="1">
+              <a:buNone/>
+              <a:defRPr sz="3600" b="1">
                 <a:solidFill>
                   <a:srgbClr val="152B3A"/>
                 </a:solidFill>
+                <a:latin typeface="Arial"/>
+                <a:ea typeface="Arial"/>
+                <a:cs typeface="Arial"/>
               </a:defRPr>
             </a:pPr>
             <a:r>
-              <a:rPr sz="3750" b="1">
+              <a:rPr sz="3600" b="1">
                 <a:solidFill>
                   <a:srgbClr val="152B3A"/>
                 </a:solidFill>
+                <a:latin typeface="Arial"/>
+                <a:ea typeface="Arial"/>
+                <a:cs typeface="Arial"/>
               </a:rPr>
               <a:t>Cover the plant and predict</a:t>
             </a:r>
@@ -5651,21 +6354,30 @@
           </a:ln>
         </p:spPr>
         <p:txBody>
-          <a:bodyPr xmlns:a="http://schemas.openxmlformats.org/drawingml/2006/main" lIns="0" tIns="0" rIns="0" bIns="0" anchor="ctr"/>
+          <a:bodyPr xmlns:a="http://schemas.openxmlformats.org/drawingml/2006/main" wrap="square" lIns="0" tIns="0" rIns="0" bIns="0" anchor="ctr">
+            <a:noAutofit/>
+          </a:bodyPr>
           <a:lstStyle xmlns:a="http://schemas.openxmlformats.org/drawingml/2006/main"/>
           <a:p xmlns:a="http://schemas.openxmlformats.org/drawingml/2006/main">
             <a:pPr>
-              <a:defRPr sz="1275" b="0">
+              <a:buNone/>
+              <a:defRPr sz="1200" b="0">
                 <a:solidFill>
                   <a:srgbClr val="50616B"/>
                 </a:solidFill>
+                <a:latin typeface="Arial"/>
+                <a:ea typeface="Arial"/>
+                <a:cs typeface="Arial"/>
               </a:defRPr>
             </a:pPr>
             <a:r>
-              <a:rPr sz="1275" b="0">
+              <a:rPr sz="1200" b="0">
                 <a:solidFill>
                   <a:srgbClr val="50616B"/>
                 </a:solidFill>
+                <a:latin typeface="Arial"/>
+                <a:ea typeface="Arial"/>
+                <a:cs typeface="Arial"/>
               </a:rPr>
               <a:t>AUTUMN 1  ·  WEEK 7  ·  LESSON B</a:t>
             </a:r>
@@ -5701,14 +6413,20 @@
           </a:ln>
         </p:spPr>
         <p:txBody>
-          <a:bodyPr xmlns:a="http://schemas.openxmlformats.org/drawingml/2006/main" lIns="0" tIns="0" rIns="0" bIns="0" anchor="ctr"/>
+          <a:bodyPr xmlns:a="http://schemas.openxmlformats.org/drawingml/2006/main" wrap="square" lIns="0" tIns="0" rIns="0" bIns="0" anchor="ctr">
+            <a:noAutofit/>
+          </a:bodyPr>
           <a:lstStyle xmlns:a="http://schemas.openxmlformats.org/drawingml/2006/main"/>
           <a:p xmlns:a="http://schemas.openxmlformats.org/drawingml/2006/main">
             <a:pPr>
+              <a:buNone/>
               <a:defRPr sz="1350" b="1">
                 <a:solidFill>
                   <a:srgbClr val="28685E"/>
                 </a:solidFill>
+                <a:latin typeface="Arial"/>
+                <a:ea typeface="Arial"/>
+                <a:cs typeface="Arial"/>
               </a:defRPr>
             </a:pPr>
             <a:r>
@@ -5716,6 +6434,9 @@
                 <a:solidFill>
                   <a:srgbClr val="28685E"/>
                 </a:solidFill>
+                <a:latin typeface="Arial"/>
+                <a:ea typeface="Arial"/>
+                <a:cs typeface="Arial"/>
               </a:rPr>
               <a:t>06</a:t>
             </a:r>
@@ -5738,8 +6459,8 @@
         </p:nvSpPr>
         <p:spPr>
           <a:xfrm xmlns:a="http://schemas.openxmlformats.org/drawingml/2006/main">
-            <a:off x="609600" y="2619375"/>
-            <a:ext cx="10972800" cy="714375"/>
+            <a:off x="609600" y="2305050"/>
+            <a:ext cx="7096125" cy="704850"/>
           </a:xfrm>
           <a:prstGeom xmlns:a="http://schemas.openxmlformats.org/drawingml/2006/main" prst="rect">
             <a:avLst/>
@@ -5751,14 +6472,20 @@
           </a:ln>
         </p:spPr>
         <p:txBody>
-          <a:bodyPr xmlns:a="http://schemas.openxmlformats.org/drawingml/2006/main" lIns="0" tIns="0" rIns="0" bIns="0" anchor="ctr"/>
+          <a:bodyPr xmlns:a="http://schemas.openxmlformats.org/drawingml/2006/main" wrap="square" lIns="0" tIns="0" rIns="0" bIns="0" anchor="ctr">
+            <a:noAutofit/>
+          </a:bodyPr>
           <a:lstStyle xmlns:a="http://schemas.openxmlformats.org/drawingml/2006/main"/>
           <a:p xmlns:a="http://schemas.openxmlformats.org/drawingml/2006/main">
             <a:pPr>
+              <a:buNone/>
               <a:defRPr sz="2550" b="0">
                 <a:solidFill>
                   <a:srgbClr val="152B3A"/>
                 </a:solidFill>
+                <a:latin typeface="Arial"/>
+                <a:ea typeface="Arial"/>
+                <a:cs typeface="Arial"/>
               </a:defRPr>
             </a:pPr>
             <a:r>
@@ -5766,6 +6493,9 @@
                 <a:solidFill>
                   <a:srgbClr val="152B3A"/>
                 </a:solidFill>
+                <a:latin typeface="Arial"/>
+                <a:ea typeface="Arial"/>
+                <a:cs typeface="Arial"/>
               </a:rPr>
               <a:t>Cover the plant in one model chain.</a:t>
             </a:r>
@@ -5788,8 +6518,8 @@
         </p:nvSpPr>
         <p:spPr>
           <a:xfrm xmlns:a="http://schemas.openxmlformats.org/drawingml/2006/main">
-            <a:off x="609600" y="3409950"/>
-            <a:ext cx="10972800" cy="714375"/>
+            <a:off x="609600" y="3143250"/>
+            <a:ext cx="7096125" cy="704850"/>
           </a:xfrm>
           <a:prstGeom xmlns:a="http://schemas.openxmlformats.org/drawingml/2006/main" prst="rect">
             <a:avLst/>
@@ -5801,14 +6531,20 @@
           </a:ln>
         </p:spPr>
         <p:txBody>
-          <a:bodyPr xmlns:a="http://schemas.openxmlformats.org/drawingml/2006/main" lIns="0" tIns="0" rIns="0" bIns="0" anchor="ctr"/>
+          <a:bodyPr xmlns:a="http://schemas.openxmlformats.org/drawingml/2006/main" wrap="square" lIns="0" tIns="0" rIns="0" bIns="0" anchor="ctr">
+            <a:noAutofit/>
+          </a:bodyPr>
           <a:lstStyle xmlns:a="http://schemas.openxmlformats.org/drawingml/2006/main"/>
           <a:p xmlns:a="http://schemas.openxmlformats.org/drawingml/2006/main">
             <a:pPr>
+              <a:buNone/>
               <a:defRPr sz="2550" b="0">
                 <a:solidFill>
                   <a:srgbClr val="152B3A"/>
                 </a:solidFill>
+                <a:latin typeface="Arial"/>
+                <a:ea typeface="Arial"/>
+                <a:cs typeface="Arial"/>
               </a:defRPr>
             </a:pPr>
             <a:r>
@@ -5816,6 +6552,9 @@
                 <a:solidFill>
                   <a:srgbClr val="152B3A"/>
                 </a:solidFill>
+                <a:latin typeface="Arial"/>
+                <a:ea typeface="Arial"/>
+                <a:cs typeface="Arial"/>
               </a:rPr>
               <a:t>Who may lose a food source first?</a:t>
             </a:r>
@@ -5838,8 +6577,8 @@
         </p:nvSpPr>
         <p:spPr>
           <a:xfrm xmlns:a="http://schemas.openxmlformats.org/drawingml/2006/main">
-            <a:off x="609600" y="4200525"/>
-            <a:ext cx="10972800" cy="714375"/>
+            <a:off x="609600" y="3981450"/>
+            <a:ext cx="7096125" cy="704850"/>
           </a:xfrm>
           <a:prstGeom xmlns:a="http://schemas.openxmlformats.org/drawingml/2006/main" prst="rect">
             <a:avLst/>
@@ -5851,14 +6590,20 @@
           </a:ln>
         </p:spPr>
         <p:txBody>
-          <a:bodyPr xmlns:a="http://schemas.openxmlformats.org/drawingml/2006/main" lIns="0" tIns="0" rIns="0" bIns="0" anchor="ctr"/>
+          <a:bodyPr xmlns:a="http://schemas.openxmlformats.org/drawingml/2006/main" wrap="square" lIns="0" tIns="0" rIns="0" bIns="0" anchor="ctr">
+            <a:noAutofit/>
+          </a:bodyPr>
           <a:lstStyle xmlns:a="http://schemas.openxmlformats.org/drawingml/2006/main"/>
           <a:p xmlns:a="http://schemas.openxmlformats.org/drawingml/2006/main">
             <a:pPr>
+              <a:buNone/>
               <a:defRPr sz="2550" b="0">
                 <a:solidFill>
                   <a:srgbClr val="152B3A"/>
                 </a:solidFill>
+                <a:latin typeface="Arial"/>
+                <a:ea typeface="Arial"/>
+                <a:cs typeface="Arial"/>
               </a:defRPr>
             </a:pPr>
             <a:r>
@@ -5866,6 +6611,9 @@
                 <a:solidFill>
                   <a:srgbClr val="152B3A"/>
                 </a:solidFill>
+                <a:latin typeface="Arial"/>
+                <a:ea typeface="Arial"/>
+                <a:cs typeface="Arial"/>
               </a:rPr>
               <a:t>What could change for the next consumer?</a:t>
             </a:r>
@@ -5888,8 +6636,8 @@
         </p:nvSpPr>
         <p:spPr>
           <a:xfrm xmlns:a="http://schemas.openxmlformats.org/drawingml/2006/main">
-            <a:off x="609600" y="4991100"/>
-            <a:ext cx="10972800" cy="714375"/>
+            <a:off x="609600" y="4819650"/>
+            <a:ext cx="7096125" cy="704850"/>
           </a:xfrm>
           <a:prstGeom xmlns:a="http://schemas.openxmlformats.org/drawingml/2006/main" prst="rect">
             <a:avLst/>
@@ -5901,27 +6649,58 @@
           </a:ln>
         </p:spPr>
         <p:txBody>
-          <a:bodyPr xmlns:a="http://schemas.openxmlformats.org/drawingml/2006/main" lIns="0" tIns="0" rIns="0" bIns="0" anchor="ctr"/>
+          <a:bodyPr xmlns:a="http://schemas.openxmlformats.org/drawingml/2006/main" wrap="square" lIns="0" tIns="0" rIns="0" bIns="0" anchor="ctr">
+            <a:noAutofit/>
+          </a:bodyPr>
           <a:lstStyle xmlns:a="http://schemas.openxmlformats.org/drawingml/2006/main"/>
           <a:p xmlns:a="http://schemas.openxmlformats.org/drawingml/2006/main">
             <a:pPr>
-              <a:defRPr sz="2550" b="0">
-                <a:solidFill>
-                  <a:srgbClr val="152B3A"/>
-                </a:solidFill>
+              <a:buNone/>
+              <a:defRPr sz="2550" b="1">
+                <a:solidFill>
+                  <a:srgbClr val="28685E"/>
+                </a:solidFill>
+                <a:latin typeface="Arial"/>
+                <a:ea typeface="Arial"/>
+                <a:cs typeface="Arial"/>
               </a:defRPr>
             </a:pPr>
             <a:r>
-              <a:rPr sz="2550" b="0">
-                <a:solidFill>
-                  <a:srgbClr val="152B3A"/>
-                </a:solidFill>
+              <a:rPr sz="2550" b="1">
+                <a:solidFill>
+                  <a:srgbClr val="28685E"/>
+                </a:solidFill>
+                <a:latin typeface="Arial"/>
+                <a:ea typeface="Arial"/>
+                <a:cs typeface="Arial"/>
               </a:rPr>
               <a:t>Use might or could and give a reason.</a:t>
             </a:r>
           </a:p>
         </p:txBody>
       </p:sp>
+      <p:pic>
+        <p:nvPicPr>
+          <p:cNvPr id="26" name=""/>
+          <p:cNvPicPr>
+            <a:picLocks xmlns:a="http://schemas.openxmlformats.org/drawingml/2006/main" noChangeAspect="1"/>
+          </p:cNvPicPr>
+          <p:nvPr/>
+        </p:nvPicPr>
+        <p:blipFill>
+          <a:blip xmlns:r="http://schemas.openxmlformats.org/officeDocument/2006/relationships" xmlns:a="http://schemas.openxmlformats.org/drawingml/2006/main" r:embed="R654ae55b627c495a"/>
+          <a:stretch xmlns:a="http://schemas.openxmlformats.org/drawingml/2006/main"/>
+        </p:blipFill>
+        <p:spPr>
+          <a:xfrm xmlns:a="http://schemas.openxmlformats.org/drawingml/2006/main">
+            <a:off x="8546306" y="2686050"/>
+            <a:ext cx="2624138" cy="2714625"/>
+          </a:xfrm>
+          <a:prstGeom xmlns:a="http://schemas.openxmlformats.org/drawingml/2006/main" prst="rect">
+            <a:avLst/>
+          </a:prstGeom>
+        </p:spPr>
+      </p:pic>
     </p:spTree>
     <p:extLst>
       <p:ext uri="{BB962C8B-B14F-4D97-AF65-F5344CB8AC3E}">
@@ -5938,7 +6717,7 @@
     <p:bg>
       <p:bgPr>
         <a:solidFill xmlns:a="http://schemas.openxmlformats.org/drawingml/2006/main">
-          <a:srgbClr val="F5F1E8"/>
+          <a:srgbClr val="FBF9F3"/>
         </a:solidFill>
       </p:bgPr>
     </p:bg>
@@ -5967,8 +6746,8 @@
         </p:nvSpPr>
         <p:spPr>
           <a:xfrm xmlns:a="http://schemas.openxmlformats.org/drawingml/2006/main">
-            <a:off x="609600" y="552450"/>
-            <a:ext cx="781050" cy="57150"/>
+            <a:off x="609600" y="742950"/>
+            <a:ext cx="9906000" cy="38100"/>
           </a:xfrm>
           <a:prstGeom xmlns:a="http://schemas.openxmlformats.org/drawingml/2006/main" prst="rect">
             <a:avLst/>
@@ -5998,8 +6777,8 @@
         </p:nvSpPr>
         <p:spPr>
           <a:xfrm xmlns:a="http://schemas.openxmlformats.org/drawingml/2006/main">
-            <a:off x="609600" y="762000"/>
-            <a:ext cx="9334500" cy="285750"/>
+            <a:off x="609600" y="342900"/>
+            <a:ext cx="9334500" cy="266700"/>
           </a:xfrm>
           <a:prstGeom xmlns:a="http://schemas.openxmlformats.org/drawingml/2006/main" prst="rect">
             <a:avLst/>
@@ -6011,21 +6790,30 @@
           </a:ln>
         </p:spPr>
         <p:txBody>
-          <a:bodyPr xmlns:a="http://schemas.openxmlformats.org/drawingml/2006/main" lIns="0" tIns="0" rIns="0" bIns="0" anchor="ctr"/>
+          <a:bodyPr xmlns:a="http://schemas.openxmlformats.org/drawingml/2006/main" wrap="square" lIns="0" tIns="0" rIns="0" bIns="0" anchor="ctr">
+            <a:noAutofit/>
+          </a:bodyPr>
           <a:lstStyle xmlns:a="http://schemas.openxmlformats.org/drawingml/2006/main"/>
           <a:p xmlns:a="http://schemas.openxmlformats.org/drawingml/2006/main">
             <a:pPr>
-              <a:defRPr sz="1500" b="1">
+              <a:buNone/>
+              <a:defRPr sz="1425" b="1">
                 <a:solidFill>
                   <a:srgbClr val="28685E"/>
                 </a:solidFill>
+                <a:latin typeface="Arial"/>
+                <a:ea typeface="Arial"/>
+                <a:cs typeface="Arial"/>
               </a:defRPr>
             </a:pPr>
             <a:r>
-              <a:rPr sz="1500" b="1">
+              <a:rPr sz="1425" b="1">
                 <a:solidFill>
                   <a:srgbClr val="28685E"/>
                 </a:solidFill>
+                <a:latin typeface="Arial"/>
+                <a:ea typeface="Arial"/>
+                <a:cs typeface="Arial"/>
               </a:rPr>
               <a:t>MADE BY MATT  /  BUILD SCIENCE</a:t>
             </a:r>
@@ -6034,14 +6822,14 @@
       </p:sp>
       <p:pic>
         <p:nvPicPr>
-          <p:cNvPr id="13" name=""/>
+          <p:cNvPr id="15" name=""/>
           <p:cNvPicPr>
             <a:picLocks xmlns:a="http://schemas.openxmlformats.org/drawingml/2006/main" noChangeAspect="1"/>
           </p:cNvPicPr>
           <p:nvPr/>
         </p:nvPicPr>
         <p:blipFill>
-          <a:blip xmlns:r="http://schemas.openxmlformats.org/officeDocument/2006/relationships" xmlns:a="http://schemas.openxmlformats.org/drawingml/2006/main" r:embed="R25f2563ce2504ce5"/>
+          <a:blip xmlns:r="http://schemas.openxmlformats.org/officeDocument/2006/relationships" xmlns:a="http://schemas.openxmlformats.org/drawingml/2006/main" r:embed="R57b32f73f9fb48db"/>
           <a:stretch xmlns:a="http://schemas.openxmlformats.org/drawingml/2006/main"/>
         </p:blipFill>
         <p:spPr>
@@ -6070,8 +6858,8 @@
         </p:nvSpPr>
         <p:spPr>
           <a:xfrm xmlns:a="http://schemas.openxmlformats.org/drawingml/2006/main">
-            <a:off x="609600" y="1352550"/>
-            <a:ext cx="10972800" cy="952500"/>
+            <a:off x="609600" y="1047750"/>
+            <a:ext cx="10972800" cy="895350"/>
           </a:xfrm>
           <a:prstGeom xmlns:a="http://schemas.openxmlformats.org/drawingml/2006/main" prst="rect">
             <a:avLst/>
@@ -6083,21 +6871,30 @@
           </a:ln>
         </p:spPr>
         <p:txBody>
-          <a:bodyPr xmlns:a="http://schemas.openxmlformats.org/drawingml/2006/main" lIns="0" tIns="0" rIns="0" bIns="0" anchor="ctr"/>
+          <a:bodyPr xmlns:a="http://schemas.openxmlformats.org/drawingml/2006/main" wrap="square" lIns="0" tIns="0" rIns="0" bIns="0" anchor="ctr">
+            <a:noAutofit/>
+          </a:bodyPr>
           <a:lstStyle xmlns:a="http://schemas.openxmlformats.org/drawingml/2006/main"/>
           <a:p xmlns:a="http://schemas.openxmlformats.org/drawingml/2006/main">
             <a:pPr>
-              <a:defRPr sz="3750" b="1">
+              <a:buNone/>
+              <a:defRPr sz="3600" b="1">
                 <a:solidFill>
                   <a:srgbClr val="152B3A"/>
                 </a:solidFill>
+                <a:latin typeface="Arial"/>
+                <a:ea typeface="Arial"/>
+                <a:cs typeface="Arial"/>
               </a:defRPr>
             </a:pPr>
             <a:r>
-              <a:rPr sz="3750" b="1">
+              <a:rPr sz="3600" b="1">
                 <a:solidFill>
                   <a:srgbClr val="152B3A"/>
                 </a:solidFill>
+                <a:latin typeface="Arial"/>
+                <a:ea typeface="Arial"/>
+                <a:cs typeface="Arial"/>
               </a:rPr>
               <a:t>Pause and test your explanation</a:t>
             </a:r>
@@ -6164,21 +6961,30 @@
           </a:ln>
         </p:spPr>
         <p:txBody>
-          <a:bodyPr xmlns:a="http://schemas.openxmlformats.org/drawingml/2006/main" lIns="0" tIns="0" rIns="0" bIns="0" anchor="ctr"/>
+          <a:bodyPr xmlns:a="http://schemas.openxmlformats.org/drawingml/2006/main" wrap="square" lIns="0" tIns="0" rIns="0" bIns="0" anchor="ctr">
+            <a:noAutofit/>
+          </a:bodyPr>
           <a:lstStyle xmlns:a="http://schemas.openxmlformats.org/drawingml/2006/main"/>
           <a:p xmlns:a="http://schemas.openxmlformats.org/drawingml/2006/main">
             <a:pPr>
-              <a:defRPr sz="1275" b="0">
+              <a:buNone/>
+              <a:defRPr sz="1200" b="0">
                 <a:solidFill>
                   <a:srgbClr val="50616B"/>
                 </a:solidFill>
+                <a:latin typeface="Arial"/>
+                <a:ea typeface="Arial"/>
+                <a:cs typeface="Arial"/>
               </a:defRPr>
             </a:pPr>
             <a:r>
-              <a:rPr sz="1275" b="0">
+              <a:rPr sz="1200" b="0">
                 <a:solidFill>
                   <a:srgbClr val="50616B"/>
                 </a:solidFill>
+                <a:latin typeface="Arial"/>
+                <a:ea typeface="Arial"/>
+                <a:cs typeface="Arial"/>
               </a:rPr>
               <a:t>AUTUMN 1  ·  WEEK 7  ·  LESSON B</a:t>
             </a:r>
@@ -6214,14 +7020,20 @@
           </a:ln>
         </p:spPr>
         <p:txBody>
-          <a:bodyPr xmlns:a="http://schemas.openxmlformats.org/drawingml/2006/main" lIns="0" tIns="0" rIns="0" bIns="0" anchor="ctr"/>
+          <a:bodyPr xmlns:a="http://schemas.openxmlformats.org/drawingml/2006/main" wrap="square" lIns="0" tIns="0" rIns="0" bIns="0" anchor="ctr">
+            <a:noAutofit/>
+          </a:bodyPr>
           <a:lstStyle xmlns:a="http://schemas.openxmlformats.org/drawingml/2006/main"/>
           <a:p xmlns:a="http://schemas.openxmlformats.org/drawingml/2006/main">
             <a:pPr>
+              <a:buNone/>
               <a:defRPr sz="1350" b="1">
                 <a:solidFill>
                   <a:srgbClr val="28685E"/>
                 </a:solidFill>
+                <a:latin typeface="Arial"/>
+                <a:ea typeface="Arial"/>
+                <a:cs typeface="Arial"/>
               </a:defRPr>
             </a:pPr>
             <a:r>
@@ -6229,6 +7041,9 @@
                 <a:solidFill>
                   <a:srgbClr val="28685E"/>
                 </a:solidFill>
+                <a:latin typeface="Arial"/>
+                <a:ea typeface="Arial"/>
+                <a:cs typeface="Arial"/>
               </a:rPr>
               <a:t>07</a:t>
             </a:r>
@@ -6251,8 +7066,8 @@
         </p:nvSpPr>
         <p:spPr>
           <a:xfrm xmlns:a="http://schemas.openxmlformats.org/drawingml/2006/main">
-            <a:off x="609600" y="2619375"/>
-            <a:ext cx="10972800" cy="781050"/>
+            <a:off x="609600" y="2305050"/>
+            <a:ext cx="10972800" cy="914400"/>
           </a:xfrm>
           <a:prstGeom xmlns:a="http://schemas.openxmlformats.org/drawingml/2006/main" prst="rect">
             <a:avLst/>
@@ -6264,14 +7079,20 @@
           </a:ln>
         </p:spPr>
         <p:txBody>
-          <a:bodyPr xmlns:a="http://schemas.openxmlformats.org/drawingml/2006/main" lIns="0" tIns="0" rIns="0" bIns="0" anchor="ctr"/>
+          <a:bodyPr xmlns:a="http://schemas.openxmlformats.org/drawingml/2006/main" wrap="square" lIns="0" tIns="0" rIns="0" bIns="0" anchor="ctr">
+            <a:noAutofit/>
+          </a:bodyPr>
           <a:lstStyle xmlns:a="http://schemas.openxmlformats.org/drawingml/2006/main"/>
           <a:p xmlns:a="http://schemas.openxmlformats.org/drawingml/2006/main">
             <a:pPr>
+              <a:buNone/>
               <a:defRPr sz="2550" b="0">
                 <a:solidFill>
                   <a:srgbClr val="152B3A"/>
                 </a:solidFill>
+                <a:latin typeface="Arial"/>
+                <a:ea typeface="Arial"/>
+                <a:cs typeface="Arial"/>
               </a:defRPr>
             </a:pPr>
             <a:r>
@@ -6279,6 +7100,9 @@
                 <a:solidFill>
                   <a:srgbClr val="152B3A"/>
                 </a:solidFill>
+                <a:latin typeface="Arial"/>
+                <a:ea typeface="Arial"/>
+                <a:cs typeface="Arial"/>
               </a:rPr>
               <a:t>Check one arrow against a feeding clue.</a:t>
             </a:r>
@@ -6301,8 +7125,8 @@
         </p:nvSpPr>
         <p:spPr>
           <a:xfrm xmlns:a="http://schemas.openxmlformats.org/drawingml/2006/main">
-            <a:off x="609600" y="3476625"/>
-            <a:ext cx="10972800" cy="781050"/>
+            <a:off x="609600" y="3352800"/>
+            <a:ext cx="10972800" cy="914400"/>
           </a:xfrm>
           <a:prstGeom xmlns:a="http://schemas.openxmlformats.org/drawingml/2006/main" prst="rect">
             <a:avLst/>
@@ -6314,14 +7138,20 @@
           </a:ln>
         </p:spPr>
         <p:txBody>
-          <a:bodyPr xmlns:a="http://schemas.openxmlformats.org/drawingml/2006/main" lIns="0" tIns="0" rIns="0" bIns="0" anchor="ctr"/>
+          <a:bodyPr xmlns:a="http://schemas.openxmlformats.org/drawingml/2006/main" wrap="square" lIns="0" tIns="0" rIns="0" bIns="0" anchor="ctr">
+            <a:noAutofit/>
+          </a:bodyPr>
           <a:lstStyle xmlns:a="http://schemas.openxmlformats.org/drawingml/2006/main"/>
           <a:p xmlns:a="http://schemas.openxmlformats.org/drawingml/2006/main">
             <a:pPr>
+              <a:buNone/>
               <a:defRPr sz="2550" b="0">
                 <a:solidFill>
                   <a:srgbClr val="152B3A"/>
                 </a:solidFill>
+                <a:latin typeface="Arial"/>
+                <a:ea typeface="Arial"/>
+                <a:cs typeface="Arial"/>
               </a:defRPr>
             </a:pPr>
             <a:r>
@@ -6329,6 +7159,9 @@
                 <a:solidFill>
                   <a:srgbClr val="152B3A"/>
                 </a:solidFill>
+                <a:latin typeface="Arial"/>
+                <a:ea typeface="Arial"/>
+                <a:cs typeface="Arial"/>
               </a:rPr>
               <a:t>Check one prediction: what is the link?</a:t>
             </a:r>
@@ -6351,8 +7184,8 @@
         </p:nvSpPr>
         <p:spPr>
           <a:xfrm xmlns:a="http://schemas.openxmlformats.org/drawingml/2006/main">
-            <a:off x="609600" y="4333875"/>
-            <a:ext cx="10972800" cy="781050"/>
+            <a:off x="609600" y="4400550"/>
+            <a:ext cx="10972800" cy="914400"/>
           </a:xfrm>
           <a:prstGeom xmlns:a="http://schemas.openxmlformats.org/drawingml/2006/main" prst="rect">
             <a:avLst/>
@@ -6364,21 +7197,30 @@
           </a:ln>
         </p:spPr>
         <p:txBody>
-          <a:bodyPr xmlns:a="http://schemas.openxmlformats.org/drawingml/2006/main" lIns="0" tIns="0" rIns="0" bIns="0" anchor="ctr"/>
+          <a:bodyPr xmlns:a="http://schemas.openxmlformats.org/drawingml/2006/main" wrap="square" lIns="0" tIns="0" rIns="0" bIns="0" anchor="ctr">
+            <a:noAutofit/>
+          </a:bodyPr>
           <a:lstStyle xmlns:a="http://schemas.openxmlformats.org/drawingml/2006/main"/>
           <a:p xmlns:a="http://schemas.openxmlformats.org/drawingml/2006/main">
             <a:pPr>
-              <a:defRPr sz="2550" b="0">
-                <a:solidFill>
-                  <a:srgbClr val="152B3A"/>
-                </a:solidFill>
+              <a:buNone/>
+              <a:defRPr sz="2550" b="1">
+                <a:solidFill>
+                  <a:srgbClr val="28685E"/>
+                </a:solidFill>
+                <a:latin typeface="Arial"/>
+                <a:ea typeface="Arial"/>
+                <a:cs typeface="Arial"/>
               </a:defRPr>
             </a:pPr>
             <a:r>
-              <a:rPr sz="2550" b="0">
-                <a:solidFill>
-                  <a:srgbClr val="152B3A"/>
-                </a:solidFill>
+              <a:rPr sz="2550" b="1">
+                <a:solidFill>
+                  <a:srgbClr val="28685E"/>
+                </a:solidFill>
+                <a:latin typeface="Arial"/>
+                <a:ea typeface="Arial"/>
+                <a:cs typeface="Arial"/>
               </a:rPr>
               <a:t>Does the model show every food source?</a:t>
             </a:r>
@@ -6401,7 +7243,7 @@
     <p:bg>
       <p:bgPr>
         <a:solidFill xmlns:a="http://schemas.openxmlformats.org/drawingml/2006/main">
-          <a:srgbClr val="F5F1E8"/>
+          <a:srgbClr val="FBF9F3"/>
         </a:solidFill>
       </p:bgPr>
     </p:bg>
@@ -6430,8 +7272,8 @@
         </p:nvSpPr>
         <p:spPr>
           <a:xfrm xmlns:a="http://schemas.openxmlformats.org/drawingml/2006/main">
-            <a:off x="609600" y="552450"/>
-            <a:ext cx="781050" cy="57150"/>
+            <a:off x="609600" y="742950"/>
+            <a:ext cx="9906000" cy="38100"/>
           </a:xfrm>
           <a:prstGeom xmlns:a="http://schemas.openxmlformats.org/drawingml/2006/main" prst="rect">
             <a:avLst/>
@@ -6461,8 +7303,8 @@
         </p:nvSpPr>
         <p:spPr>
           <a:xfrm xmlns:a="http://schemas.openxmlformats.org/drawingml/2006/main">
-            <a:off x="609600" y="762000"/>
-            <a:ext cx="9334500" cy="285750"/>
+            <a:off x="609600" y="342900"/>
+            <a:ext cx="9334500" cy="266700"/>
           </a:xfrm>
           <a:prstGeom xmlns:a="http://schemas.openxmlformats.org/drawingml/2006/main" prst="rect">
             <a:avLst/>
@@ -6474,21 +7316,30 @@
           </a:ln>
         </p:spPr>
         <p:txBody>
-          <a:bodyPr xmlns:a="http://schemas.openxmlformats.org/drawingml/2006/main" lIns="0" tIns="0" rIns="0" bIns="0" anchor="ctr"/>
+          <a:bodyPr xmlns:a="http://schemas.openxmlformats.org/drawingml/2006/main" wrap="square" lIns="0" tIns="0" rIns="0" bIns="0" anchor="ctr">
+            <a:noAutofit/>
+          </a:bodyPr>
           <a:lstStyle xmlns:a="http://schemas.openxmlformats.org/drawingml/2006/main"/>
           <a:p xmlns:a="http://schemas.openxmlformats.org/drawingml/2006/main">
             <a:pPr>
-              <a:defRPr sz="1500" b="1">
+              <a:buNone/>
+              <a:defRPr sz="1425" b="1">
                 <a:solidFill>
                   <a:srgbClr val="28685E"/>
                 </a:solidFill>
+                <a:latin typeface="Arial"/>
+                <a:ea typeface="Arial"/>
+                <a:cs typeface="Arial"/>
               </a:defRPr>
             </a:pPr>
             <a:r>
-              <a:rPr sz="1500" b="1">
+              <a:rPr sz="1425" b="1">
                 <a:solidFill>
                   <a:srgbClr val="28685E"/>
                 </a:solidFill>
+                <a:latin typeface="Arial"/>
+                <a:ea typeface="Arial"/>
+                <a:cs typeface="Arial"/>
               </a:rPr>
               <a:t>MADE BY MATT  /  BUILD SCIENCE</a:t>
             </a:r>
@@ -6497,14 +7348,14 @@
       </p:sp>
       <p:pic>
         <p:nvPicPr>
-          <p:cNvPr id="14" name=""/>
+          <p:cNvPr id="16" name=""/>
           <p:cNvPicPr>
             <a:picLocks xmlns:a="http://schemas.openxmlformats.org/drawingml/2006/main" noChangeAspect="1"/>
           </p:cNvPicPr>
           <p:nvPr/>
         </p:nvPicPr>
         <p:blipFill>
-          <a:blip xmlns:r="http://schemas.openxmlformats.org/officeDocument/2006/relationships" xmlns:a="http://schemas.openxmlformats.org/drawingml/2006/main" r:embed="Radf1b61eed9d451d"/>
+          <a:blip xmlns:r="http://schemas.openxmlformats.org/officeDocument/2006/relationships" xmlns:a="http://schemas.openxmlformats.org/drawingml/2006/main" r:embed="Rbba63ee023ca47f6"/>
           <a:stretch xmlns:a="http://schemas.openxmlformats.org/drawingml/2006/main"/>
         </p:blipFill>
         <p:spPr>
@@ -6533,8 +7384,8 @@
         </p:nvSpPr>
         <p:spPr>
           <a:xfrm xmlns:a="http://schemas.openxmlformats.org/drawingml/2006/main">
-            <a:off x="609600" y="1352550"/>
-            <a:ext cx="10972800" cy="952500"/>
+            <a:off x="609600" y="1047750"/>
+            <a:ext cx="10972800" cy="895350"/>
           </a:xfrm>
           <a:prstGeom xmlns:a="http://schemas.openxmlformats.org/drawingml/2006/main" prst="rect">
             <a:avLst/>
@@ -6546,21 +7397,30 @@
           </a:ln>
         </p:spPr>
         <p:txBody>
-          <a:bodyPr xmlns:a="http://schemas.openxmlformats.org/drawingml/2006/main" lIns="0" tIns="0" rIns="0" bIns="0" anchor="ctr"/>
+          <a:bodyPr xmlns:a="http://schemas.openxmlformats.org/drawingml/2006/main" wrap="square" lIns="0" tIns="0" rIns="0" bIns="0" anchor="ctr">
+            <a:noAutofit/>
+          </a:bodyPr>
           <a:lstStyle xmlns:a="http://schemas.openxmlformats.org/drawingml/2006/main"/>
           <a:p xmlns:a="http://schemas.openxmlformats.org/drawingml/2006/main">
             <a:pPr>
-              <a:defRPr sz="3750" b="1">
+              <a:buNone/>
+              <a:defRPr sz="3600" b="1">
                 <a:solidFill>
                   <a:srgbClr val="152B3A"/>
                 </a:solidFill>
+                <a:latin typeface="Arial"/>
+                <a:ea typeface="Arial"/>
+                <a:cs typeface="Arial"/>
               </a:defRPr>
             </a:pPr>
             <a:r>
-              <a:rPr sz="3750" b="1">
+              <a:rPr sz="3600" b="1">
                 <a:solidFill>
                   <a:srgbClr val="152B3A"/>
                 </a:solidFill>
+                <a:latin typeface="Arial"/>
+                <a:ea typeface="Arial"/>
+                <a:cs typeface="Arial"/>
               </a:rPr>
               <a:t>Improve, save and clear the model</a:t>
             </a:r>
@@ -6627,21 +7487,30 @@
           </a:ln>
         </p:spPr>
         <p:txBody>
-          <a:bodyPr xmlns:a="http://schemas.openxmlformats.org/drawingml/2006/main" lIns="0" tIns="0" rIns="0" bIns="0" anchor="ctr"/>
+          <a:bodyPr xmlns:a="http://schemas.openxmlformats.org/drawingml/2006/main" wrap="square" lIns="0" tIns="0" rIns="0" bIns="0" anchor="ctr">
+            <a:noAutofit/>
+          </a:bodyPr>
           <a:lstStyle xmlns:a="http://schemas.openxmlformats.org/drawingml/2006/main"/>
           <a:p xmlns:a="http://schemas.openxmlformats.org/drawingml/2006/main">
             <a:pPr>
-              <a:defRPr sz="1275" b="0">
+              <a:buNone/>
+              <a:defRPr sz="1200" b="0">
                 <a:solidFill>
                   <a:srgbClr val="50616B"/>
                 </a:solidFill>
+                <a:latin typeface="Arial"/>
+                <a:ea typeface="Arial"/>
+                <a:cs typeface="Arial"/>
               </a:defRPr>
             </a:pPr>
             <a:r>
-              <a:rPr sz="1275" b="0">
+              <a:rPr sz="1200" b="0">
                 <a:solidFill>
                   <a:srgbClr val="50616B"/>
                 </a:solidFill>
+                <a:latin typeface="Arial"/>
+                <a:ea typeface="Arial"/>
+                <a:cs typeface="Arial"/>
               </a:rPr>
               <a:t>AUTUMN 1  ·  WEEK 7  ·  LESSON B</a:t>
             </a:r>
@@ -6677,14 +7546,20 @@
           </a:ln>
         </p:spPr>
         <p:txBody>
-          <a:bodyPr xmlns:a="http://schemas.openxmlformats.org/drawingml/2006/main" lIns="0" tIns="0" rIns="0" bIns="0" anchor="ctr"/>
+          <a:bodyPr xmlns:a="http://schemas.openxmlformats.org/drawingml/2006/main" wrap="square" lIns="0" tIns="0" rIns="0" bIns="0" anchor="ctr">
+            <a:noAutofit/>
+          </a:bodyPr>
           <a:lstStyle xmlns:a="http://schemas.openxmlformats.org/drawingml/2006/main"/>
           <a:p xmlns:a="http://schemas.openxmlformats.org/drawingml/2006/main">
             <a:pPr>
+              <a:buNone/>
               <a:defRPr sz="1350" b="1">
                 <a:solidFill>
                   <a:srgbClr val="28685E"/>
                 </a:solidFill>
+                <a:latin typeface="Arial"/>
+                <a:ea typeface="Arial"/>
+                <a:cs typeface="Arial"/>
               </a:defRPr>
             </a:pPr>
             <a:r>
@@ -6692,6 +7567,9 @@
                 <a:solidFill>
                   <a:srgbClr val="28685E"/>
                 </a:solidFill>
+                <a:latin typeface="Arial"/>
+                <a:ea typeface="Arial"/>
+                <a:cs typeface="Arial"/>
               </a:rPr>
               <a:t>08</a:t>
             </a:r>
@@ -6714,8 +7592,8 @@
         </p:nvSpPr>
         <p:spPr>
           <a:xfrm xmlns:a="http://schemas.openxmlformats.org/drawingml/2006/main">
-            <a:off x="609600" y="2619375"/>
-            <a:ext cx="10972800" cy="714375"/>
+            <a:off x="609600" y="2305050"/>
+            <a:ext cx="10972800" cy="704850"/>
           </a:xfrm>
           <a:prstGeom xmlns:a="http://schemas.openxmlformats.org/drawingml/2006/main" prst="rect">
             <a:avLst/>
@@ -6727,14 +7605,20 @@
           </a:ln>
         </p:spPr>
         <p:txBody>
-          <a:bodyPr xmlns:a="http://schemas.openxmlformats.org/drawingml/2006/main" lIns="0" tIns="0" rIns="0" bIns="0" anchor="ctr"/>
+          <a:bodyPr xmlns:a="http://schemas.openxmlformats.org/drawingml/2006/main" wrap="square" lIns="0" tIns="0" rIns="0" bIns="0" anchor="ctr">
+            <a:noAutofit/>
+          </a:bodyPr>
           <a:lstStyle xmlns:a="http://schemas.openxmlformats.org/drawingml/2006/main"/>
           <a:p xmlns:a="http://schemas.openxmlformats.org/drawingml/2006/main">
             <a:pPr>
+              <a:buNone/>
               <a:defRPr sz="2550" b="0">
                 <a:solidFill>
                   <a:srgbClr val="152B3A"/>
                 </a:solidFill>
+                <a:latin typeface="Arial"/>
+                <a:ea typeface="Arial"/>
+                <a:cs typeface="Arial"/>
               </a:defRPr>
             </a:pPr>
             <a:r>
@@ -6742,6 +7626,9 @@
                 <a:solidFill>
                   <a:srgbClr val="152B3A"/>
                 </a:solidFill>
+                <a:latin typeface="Arial"/>
+                <a:ea typeface="Arial"/>
+                <a:cs typeface="Arial"/>
               </a:rPr>
               <a:t>Put the chain back or revise it.</a:t>
             </a:r>
@@ -6764,8 +7651,8 @@
         </p:nvSpPr>
         <p:spPr>
           <a:xfrm xmlns:a="http://schemas.openxmlformats.org/drawingml/2006/main">
-            <a:off x="609600" y="3409950"/>
-            <a:ext cx="10972800" cy="714375"/>
+            <a:off x="609600" y="3143250"/>
+            <a:ext cx="10972800" cy="704850"/>
           </a:xfrm>
           <a:prstGeom xmlns:a="http://schemas.openxmlformats.org/drawingml/2006/main" prst="rect">
             <a:avLst/>
@@ -6777,14 +7664,20 @@
           </a:ln>
         </p:spPr>
         <p:txBody>
-          <a:bodyPr xmlns:a="http://schemas.openxmlformats.org/drawingml/2006/main" lIns="0" tIns="0" rIns="0" bIns="0" anchor="ctr"/>
+          <a:bodyPr xmlns:a="http://schemas.openxmlformats.org/drawingml/2006/main" wrap="square" lIns="0" tIns="0" rIns="0" bIns="0" anchor="ctr">
+            <a:noAutofit/>
+          </a:bodyPr>
           <a:lstStyle xmlns:a="http://schemas.openxmlformats.org/drawingml/2006/main"/>
           <a:p xmlns:a="http://schemas.openxmlformats.org/drawingml/2006/main">
             <a:pPr>
+              <a:buNone/>
               <a:defRPr sz="2550" b="0">
                 <a:solidFill>
                   <a:srgbClr val="152B3A"/>
                 </a:solidFill>
+                <a:latin typeface="Arial"/>
+                <a:ea typeface="Arial"/>
+                <a:cs typeface="Arial"/>
               </a:defRPr>
             </a:pPr>
             <a:r>
@@ -6792,6 +7685,9 @@
                 <a:solidFill>
                   <a:srgbClr val="152B3A"/>
                 </a:solidFill>
+                <a:latin typeface="Arial"/>
+                <a:ea typeface="Arial"/>
+                <a:cs typeface="Arial"/>
               </a:rPr>
               <a:t>Improve one arrow reason or prediction.</a:t>
             </a:r>
@@ -6814,8 +7710,8 @@
         </p:nvSpPr>
         <p:spPr>
           <a:xfrm xmlns:a="http://schemas.openxmlformats.org/drawingml/2006/main">
-            <a:off x="609600" y="4200525"/>
-            <a:ext cx="10972800" cy="714375"/>
+            <a:off x="609600" y="3981450"/>
+            <a:ext cx="10972800" cy="704850"/>
           </a:xfrm>
           <a:prstGeom xmlns:a="http://schemas.openxmlformats.org/drawingml/2006/main" prst="rect">
             <a:avLst/>
@@ -6827,14 +7723,20 @@
           </a:ln>
         </p:spPr>
         <p:txBody>
-          <a:bodyPr xmlns:a="http://schemas.openxmlformats.org/drawingml/2006/main" lIns="0" tIns="0" rIns="0" bIns="0" anchor="ctr"/>
+          <a:bodyPr xmlns:a="http://schemas.openxmlformats.org/drawingml/2006/main" wrap="square" lIns="0" tIns="0" rIns="0" bIns="0" anchor="ctr">
+            <a:noAutofit/>
+          </a:bodyPr>
           <a:lstStyle xmlns:a="http://schemas.openxmlformats.org/drawingml/2006/main"/>
           <a:p xmlns:a="http://schemas.openxmlformats.org/drawingml/2006/main">
             <a:pPr>
+              <a:buNone/>
               <a:defRPr sz="2550" b="0">
                 <a:solidFill>
                   <a:srgbClr val="152B3A"/>
                 </a:solidFill>
+                <a:latin typeface="Arial"/>
+                <a:ea typeface="Arial"/>
+                <a:cs typeface="Arial"/>
               </a:defRPr>
             </a:pPr>
             <a:r>
@@ -6842,6 +7744,9 @@
                 <a:solidFill>
                   <a:srgbClr val="152B3A"/>
                 </a:solidFill>
+                <a:latin typeface="Arial"/>
+                <a:ea typeface="Arial"/>
+                <a:cs typeface="Arial"/>
               </a:rPr>
               <a:t>State one limit of this simple model.</a:t>
             </a:r>
@@ -6864,8 +7769,8 @@
         </p:nvSpPr>
         <p:spPr>
           <a:xfrm xmlns:a="http://schemas.openxmlformats.org/drawingml/2006/main">
-            <a:off x="609600" y="4991100"/>
-            <a:ext cx="10972800" cy="714375"/>
+            <a:off x="609600" y="4819650"/>
+            <a:ext cx="10972800" cy="704850"/>
           </a:xfrm>
           <a:prstGeom xmlns:a="http://schemas.openxmlformats.org/drawingml/2006/main" prst="rect">
             <a:avLst/>
@@ -6877,21 +7782,30 @@
           </a:ln>
         </p:spPr>
         <p:txBody>
-          <a:bodyPr xmlns:a="http://schemas.openxmlformats.org/drawingml/2006/main" lIns="0" tIns="0" rIns="0" bIns="0" anchor="ctr"/>
+          <a:bodyPr xmlns:a="http://schemas.openxmlformats.org/drawingml/2006/main" wrap="square" lIns="0" tIns="0" rIns="0" bIns="0" anchor="ctr">
+            <a:noAutofit/>
+          </a:bodyPr>
           <a:lstStyle xmlns:a="http://schemas.openxmlformats.org/drawingml/2006/main"/>
           <a:p xmlns:a="http://schemas.openxmlformats.org/drawingml/2006/main">
             <a:pPr>
-              <a:defRPr sz="2550" b="0">
-                <a:solidFill>
-                  <a:srgbClr val="152B3A"/>
-                </a:solidFill>
+              <a:buNone/>
+              <a:defRPr sz="2550" b="1">
+                <a:solidFill>
+                  <a:srgbClr val="28685E"/>
+                </a:solidFill>
+                <a:latin typeface="Arial"/>
+                <a:ea typeface="Arial"/>
+                <a:cs typeface="Arial"/>
               </a:defRPr>
             </a:pPr>
             <a:r>
-              <a:rPr sz="2550" b="0">
-                <a:solidFill>
-                  <a:srgbClr val="152B3A"/>
-                </a:solidFill>
+              <a:rPr sz="2550" b="1">
+                <a:solidFill>
+                  <a:srgbClr val="28685E"/>
+                </a:solidFill>
+                <a:latin typeface="Arial"/>
+                <a:ea typeface="Arial"/>
+                <a:cs typeface="Arial"/>
               </a:rPr>
               <a:t>Save the record and put the cards away.</a:t>
             </a:r>
@@ -6914,7 +7828,7 @@
     <p:bg>
       <p:bgPr>
         <a:solidFill xmlns:a="http://schemas.openxmlformats.org/drawingml/2006/main">
-          <a:srgbClr val="F5F1E8"/>
+          <a:srgbClr val="FBF9F3"/>
         </a:solidFill>
       </p:bgPr>
     </p:bg>
@@ -6943,8 +7857,8 @@
         </p:nvSpPr>
         <p:spPr>
           <a:xfrm xmlns:a="http://schemas.openxmlformats.org/drawingml/2006/main">
-            <a:off x="609600" y="552450"/>
-            <a:ext cx="781050" cy="57150"/>
+            <a:off x="609600" y="742950"/>
+            <a:ext cx="9906000" cy="38100"/>
           </a:xfrm>
           <a:prstGeom xmlns:a="http://schemas.openxmlformats.org/drawingml/2006/main" prst="rect">
             <a:avLst/>
@@ -6974,8 +7888,8 @@
         </p:nvSpPr>
         <p:spPr>
           <a:xfrm xmlns:a="http://schemas.openxmlformats.org/drawingml/2006/main">
-            <a:off x="609600" y="762000"/>
-            <a:ext cx="9334500" cy="285750"/>
+            <a:off x="609600" y="342900"/>
+            <a:ext cx="9334500" cy="266700"/>
           </a:xfrm>
           <a:prstGeom xmlns:a="http://schemas.openxmlformats.org/drawingml/2006/main" prst="rect">
             <a:avLst/>
@@ -6987,21 +7901,30 @@
           </a:ln>
         </p:spPr>
         <p:txBody>
-          <a:bodyPr xmlns:a="http://schemas.openxmlformats.org/drawingml/2006/main" lIns="0" tIns="0" rIns="0" bIns="0" anchor="ctr"/>
+          <a:bodyPr xmlns:a="http://schemas.openxmlformats.org/drawingml/2006/main" wrap="square" lIns="0" tIns="0" rIns="0" bIns="0" anchor="ctr">
+            <a:noAutofit/>
+          </a:bodyPr>
           <a:lstStyle xmlns:a="http://schemas.openxmlformats.org/drawingml/2006/main"/>
           <a:p xmlns:a="http://schemas.openxmlformats.org/drawingml/2006/main">
             <a:pPr>
-              <a:defRPr sz="1500" b="1">
+              <a:buNone/>
+              <a:defRPr sz="1425" b="1">
                 <a:solidFill>
                   <a:srgbClr val="28685E"/>
                 </a:solidFill>
+                <a:latin typeface="Arial"/>
+                <a:ea typeface="Arial"/>
+                <a:cs typeface="Arial"/>
               </a:defRPr>
             </a:pPr>
             <a:r>
-              <a:rPr sz="1500" b="1">
+              <a:rPr sz="1425" b="1">
                 <a:solidFill>
                   <a:srgbClr val="28685E"/>
                 </a:solidFill>
+                <a:latin typeface="Arial"/>
+                <a:ea typeface="Arial"/>
+                <a:cs typeface="Arial"/>
               </a:rPr>
               <a:t>MADE BY MATT  /  BUILD SCIENCE</a:t>
             </a:r>
@@ -7010,14 +7933,14 @@
       </p:sp>
       <p:pic>
         <p:nvPicPr>
-          <p:cNvPr id="14" name=""/>
+          <p:cNvPr id="16" name=""/>
           <p:cNvPicPr>
             <a:picLocks xmlns:a="http://schemas.openxmlformats.org/drawingml/2006/main" noChangeAspect="1"/>
           </p:cNvPicPr>
           <p:nvPr/>
         </p:nvPicPr>
         <p:blipFill>
-          <a:blip xmlns:r="http://schemas.openxmlformats.org/officeDocument/2006/relationships" xmlns:a="http://schemas.openxmlformats.org/drawingml/2006/main" r:embed="Rc68f8824b7e64d51"/>
+          <a:blip xmlns:r="http://schemas.openxmlformats.org/officeDocument/2006/relationships" xmlns:a="http://schemas.openxmlformats.org/drawingml/2006/main" r:embed="Rcb298d798fe14dc0"/>
           <a:stretch xmlns:a="http://schemas.openxmlformats.org/drawingml/2006/main"/>
         </p:blipFill>
         <p:spPr>
@@ -7046,8 +7969,8 @@
         </p:nvSpPr>
         <p:spPr>
           <a:xfrm xmlns:a="http://schemas.openxmlformats.org/drawingml/2006/main">
-            <a:off x="609600" y="1352550"/>
-            <a:ext cx="10972800" cy="952500"/>
+            <a:off x="609600" y="1047750"/>
+            <a:ext cx="10972800" cy="895350"/>
           </a:xfrm>
           <a:prstGeom xmlns:a="http://schemas.openxmlformats.org/drawingml/2006/main" prst="rect">
             <a:avLst/>
@@ -7059,21 +7982,30 @@
           </a:ln>
         </p:spPr>
         <p:txBody>
-          <a:bodyPr xmlns:a="http://schemas.openxmlformats.org/drawingml/2006/main" lIns="0" tIns="0" rIns="0" bIns="0" anchor="ctr"/>
+          <a:bodyPr xmlns:a="http://schemas.openxmlformats.org/drawingml/2006/main" wrap="square" lIns="0" tIns="0" rIns="0" bIns="0" anchor="ctr">
+            <a:noAutofit/>
+          </a:bodyPr>
           <a:lstStyle xmlns:a="http://schemas.openxmlformats.org/drawingml/2006/main"/>
           <a:p xmlns:a="http://schemas.openxmlformats.org/drawingml/2006/main">
             <a:pPr>
-              <a:defRPr sz="3750" b="1">
+              <a:buNone/>
+              <a:defRPr sz="3600" b="1">
                 <a:solidFill>
                   <a:srgbClr val="152B3A"/>
                 </a:solidFill>
+                <a:latin typeface="Arial"/>
+                <a:ea typeface="Arial"/>
+                <a:cs typeface="Arial"/>
               </a:defRPr>
             </a:pPr>
             <a:r>
-              <a:rPr sz="3750" b="1">
+              <a:rPr sz="3600" b="1">
                 <a:solidFill>
                   <a:srgbClr val="152B3A"/>
                 </a:solidFill>
+                <a:latin typeface="Arial"/>
+                <a:ea typeface="Arial"/>
+                <a:cs typeface="Arial"/>
               </a:rPr>
               <a:t>Your voice can change the lesson</a:t>
             </a:r>
@@ -7140,21 +8072,30 @@
           </a:ln>
         </p:spPr>
         <p:txBody>
-          <a:bodyPr xmlns:a="http://schemas.openxmlformats.org/drawingml/2006/main" lIns="0" tIns="0" rIns="0" bIns="0" anchor="ctr"/>
+          <a:bodyPr xmlns:a="http://schemas.openxmlformats.org/drawingml/2006/main" wrap="square" lIns="0" tIns="0" rIns="0" bIns="0" anchor="ctr">
+            <a:noAutofit/>
+          </a:bodyPr>
           <a:lstStyle xmlns:a="http://schemas.openxmlformats.org/drawingml/2006/main"/>
           <a:p xmlns:a="http://schemas.openxmlformats.org/drawingml/2006/main">
             <a:pPr>
-              <a:defRPr sz="1275" b="0">
+              <a:buNone/>
+              <a:defRPr sz="1200" b="0">
                 <a:solidFill>
                   <a:srgbClr val="50616B"/>
                 </a:solidFill>
+                <a:latin typeface="Arial"/>
+                <a:ea typeface="Arial"/>
+                <a:cs typeface="Arial"/>
               </a:defRPr>
             </a:pPr>
             <a:r>
-              <a:rPr sz="1275" b="0">
+              <a:rPr sz="1200" b="0">
                 <a:solidFill>
                   <a:srgbClr val="50616B"/>
                 </a:solidFill>
+                <a:latin typeface="Arial"/>
+                <a:ea typeface="Arial"/>
+                <a:cs typeface="Arial"/>
               </a:rPr>
               <a:t>AUTUMN 1  ·  WEEK 7  ·  LESSON B</a:t>
             </a:r>
@@ -7190,14 +8131,20 @@
           </a:ln>
         </p:spPr>
         <p:txBody>
-          <a:bodyPr xmlns:a="http://schemas.openxmlformats.org/drawingml/2006/main" lIns="0" tIns="0" rIns="0" bIns="0" anchor="ctr"/>
+          <a:bodyPr xmlns:a="http://schemas.openxmlformats.org/drawingml/2006/main" wrap="square" lIns="0" tIns="0" rIns="0" bIns="0" anchor="ctr">
+            <a:noAutofit/>
+          </a:bodyPr>
           <a:lstStyle xmlns:a="http://schemas.openxmlformats.org/drawingml/2006/main"/>
           <a:p xmlns:a="http://schemas.openxmlformats.org/drawingml/2006/main">
             <a:pPr>
+              <a:buNone/>
               <a:defRPr sz="1350" b="1">
                 <a:solidFill>
                   <a:srgbClr val="28685E"/>
                 </a:solidFill>
+                <a:latin typeface="Arial"/>
+                <a:ea typeface="Arial"/>
+                <a:cs typeface="Arial"/>
               </a:defRPr>
             </a:pPr>
             <a:r>
@@ -7205,6 +8152,9 @@
                 <a:solidFill>
                   <a:srgbClr val="28685E"/>
                 </a:solidFill>
+                <a:latin typeface="Arial"/>
+                <a:ea typeface="Arial"/>
+                <a:cs typeface="Arial"/>
               </a:rPr>
               <a:t>09</a:t>
             </a:r>
@@ -7227,8 +8177,8 @@
         </p:nvSpPr>
         <p:spPr>
           <a:xfrm xmlns:a="http://schemas.openxmlformats.org/drawingml/2006/main">
-            <a:off x="609600" y="2619375"/>
-            <a:ext cx="10972800" cy="714375"/>
+            <a:off x="609600" y="2305050"/>
+            <a:ext cx="10972800" cy="704850"/>
           </a:xfrm>
           <a:prstGeom xmlns:a="http://schemas.openxmlformats.org/drawingml/2006/main" prst="rect">
             <a:avLst/>
@@ -7240,14 +8190,20 @@
           </a:ln>
         </p:spPr>
         <p:txBody>
-          <a:bodyPr xmlns:a="http://schemas.openxmlformats.org/drawingml/2006/main" lIns="0" tIns="0" rIns="0" bIns="0" anchor="ctr"/>
+          <a:bodyPr xmlns:a="http://schemas.openxmlformats.org/drawingml/2006/main" wrap="square" lIns="0" tIns="0" rIns="0" bIns="0" anchor="ctr">
+            <a:noAutofit/>
+          </a:bodyPr>
           <a:lstStyle xmlns:a="http://schemas.openxmlformats.org/drawingml/2006/main"/>
           <a:p xmlns:a="http://schemas.openxmlformats.org/drawingml/2006/main">
             <a:pPr>
+              <a:buNone/>
               <a:defRPr sz="2550" b="0">
                 <a:solidFill>
                   <a:srgbClr val="152B3A"/>
                 </a:solidFill>
+                <a:latin typeface="Arial"/>
+                <a:ea typeface="Arial"/>
+                <a:cs typeface="Arial"/>
               </a:defRPr>
             </a:pPr>
             <a:r>
@@ -7255,6 +8211,9 @@
                 <a:solidFill>
                   <a:srgbClr val="152B3A"/>
                 </a:solidFill>
+                <a:latin typeface="Arial"/>
+                <a:ea typeface="Arial"/>
+                <a:cs typeface="Arial"/>
               </a:rPr>
               <a:t>What helped you join in?</a:t>
             </a:r>
@@ -7277,8 +8236,8 @@
         </p:nvSpPr>
         <p:spPr>
           <a:xfrm xmlns:a="http://schemas.openxmlformats.org/drawingml/2006/main">
-            <a:off x="609600" y="3409950"/>
-            <a:ext cx="10972800" cy="714375"/>
+            <a:off x="609600" y="3143250"/>
+            <a:ext cx="10972800" cy="704850"/>
           </a:xfrm>
           <a:prstGeom xmlns:a="http://schemas.openxmlformats.org/drawingml/2006/main" prst="rect">
             <a:avLst/>
@@ -7290,14 +8249,20 @@
           </a:ln>
         </p:spPr>
         <p:txBody>
-          <a:bodyPr xmlns:a="http://schemas.openxmlformats.org/drawingml/2006/main" lIns="0" tIns="0" rIns="0" bIns="0" anchor="ctr"/>
+          <a:bodyPr xmlns:a="http://schemas.openxmlformats.org/drawingml/2006/main" wrap="square" lIns="0" tIns="0" rIns="0" bIns="0" anchor="ctr">
+            <a:noAutofit/>
+          </a:bodyPr>
           <a:lstStyle xmlns:a="http://schemas.openxmlformats.org/drawingml/2006/main"/>
           <a:p xmlns:a="http://schemas.openxmlformats.org/drawingml/2006/main">
             <a:pPr>
+              <a:buNone/>
               <a:defRPr sz="2550" b="0">
                 <a:solidFill>
                   <a:srgbClr val="152B3A"/>
                 </a:solidFill>
+                <a:latin typeface="Arial"/>
+                <a:ea typeface="Arial"/>
+                <a:cs typeface="Arial"/>
               </a:defRPr>
             </a:pPr>
             <a:r>
@@ -7305,6 +8270,9 @@
                 <a:solidFill>
                   <a:srgbClr val="152B3A"/>
                 </a:solidFill>
+                <a:latin typeface="Arial"/>
+                <a:ea typeface="Arial"/>
+                <a:cs typeface="Arial"/>
               </a:rPr>
               <a:t>What could make the next activity easier?</a:t>
             </a:r>
@@ -7327,8 +8295,8 @@
         </p:nvSpPr>
         <p:spPr>
           <a:xfrm xmlns:a="http://schemas.openxmlformats.org/drawingml/2006/main">
-            <a:off x="609600" y="4200525"/>
-            <a:ext cx="10972800" cy="714375"/>
+            <a:off x="609600" y="3981450"/>
+            <a:ext cx="10972800" cy="704850"/>
           </a:xfrm>
           <a:prstGeom xmlns:a="http://schemas.openxmlformats.org/drawingml/2006/main" prst="rect">
             <a:avLst/>
@@ -7340,14 +8308,20 @@
           </a:ln>
         </p:spPr>
         <p:txBody>
-          <a:bodyPr xmlns:a="http://schemas.openxmlformats.org/drawingml/2006/main" lIns="0" tIns="0" rIns="0" bIns="0" anchor="ctr"/>
+          <a:bodyPr xmlns:a="http://schemas.openxmlformats.org/drawingml/2006/main" wrap="square" lIns="0" tIns="0" rIns="0" bIns="0" anchor="ctr">
+            <a:noAutofit/>
+          </a:bodyPr>
           <a:lstStyle xmlns:a="http://schemas.openxmlformats.org/drawingml/2006/main"/>
           <a:p xmlns:a="http://schemas.openxmlformats.org/drawingml/2006/main">
             <a:pPr>
+              <a:buNone/>
               <a:defRPr sz="2550" b="0">
                 <a:solidFill>
                   <a:srgbClr val="152B3A"/>
                 </a:solidFill>
+                <a:latin typeface="Arial"/>
+                <a:ea typeface="Arial"/>
+                <a:cs typeface="Arial"/>
               </a:defRPr>
             </a:pPr>
             <a:r>
@@ -7355,6 +8329,9 @@
                 <a:solidFill>
                   <a:srgbClr val="152B3A"/>
                 </a:solidFill>
+                <a:latin typeface="Arial"/>
+                <a:ea typeface="Arial"/>
+                <a:cs typeface="Arial"/>
               </a:rPr>
               <a:t>Point, sign, speak, write or pass privately.</a:t>
             </a:r>
@@ -7377,8 +8354,8 @@
         </p:nvSpPr>
         <p:spPr>
           <a:xfrm xmlns:a="http://schemas.openxmlformats.org/drawingml/2006/main">
-            <a:off x="609600" y="4991100"/>
-            <a:ext cx="10972800" cy="714375"/>
+            <a:off x="609600" y="4819650"/>
+            <a:ext cx="10972800" cy="704850"/>
           </a:xfrm>
           <a:prstGeom xmlns:a="http://schemas.openxmlformats.org/drawingml/2006/main" prst="rect">
             <a:avLst/>
@@ -7390,21 +8367,30 @@
           </a:ln>
         </p:spPr>
         <p:txBody>
-          <a:bodyPr xmlns:a="http://schemas.openxmlformats.org/drawingml/2006/main" lIns="0" tIns="0" rIns="0" bIns="0" anchor="ctr"/>
+          <a:bodyPr xmlns:a="http://schemas.openxmlformats.org/drawingml/2006/main" wrap="square" lIns="0" tIns="0" rIns="0" bIns="0" anchor="ctr">
+            <a:noAutofit/>
+          </a:bodyPr>
           <a:lstStyle xmlns:a="http://schemas.openxmlformats.org/drawingml/2006/main"/>
           <a:p xmlns:a="http://schemas.openxmlformats.org/drawingml/2006/main">
             <a:pPr>
-              <a:defRPr sz="2550" b="0">
-                <a:solidFill>
-                  <a:srgbClr val="152B3A"/>
-                </a:solidFill>
+              <a:buNone/>
+              <a:defRPr sz="2550" b="1">
+                <a:solidFill>
+                  <a:srgbClr val="28685E"/>
+                </a:solidFill>
+                <a:latin typeface="Arial"/>
+                <a:ea typeface="Arial"/>
+                <a:cs typeface="Arial"/>
               </a:defRPr>
             </a:pPr>
             <a:r>
-              <a:rPr sz="2550" b="0">
-                <a:solidFill>
-                  <a:srgbClr val="152B3A"/>
-                </a:solidFill>
+              <a:rPr sz="2550" b="1">
+                <a:solidFill>
+                  <a:srgbClr val="28685E"/>
+                </a:solidFill>
+                <a:latin typeface="Arial"/>
+                <a:ea typeface="Arial"/>
+                <a:cs typeface="Arial"/>
               </a:rPr>
               <a:t>Adult: agree one change and explain any limit.</a:t>
             </a:r>
